--- a/课程项目汇报_多语言文本去毒化.pptx
+++ b/课程项目汇报_多语言文本去毒化.pptx
@@ -16,7 +16,6 @@
     <p:sldId id="264" r:id="rId15"/>
     <p:sldId id="265" r:id="rId16"/>
     <p:sldId id="266" r:id="rId17"/>
-    <p:sldId id="267" r:id="rId18"/>
   </p:sldIdLst>
   <p:sldSz cx="12191695" cy="6858000" type="screen4x3"/>
   <p:notesSz cx="6858000" cy="9144000"/>
@@ -3343,7 +3342,7 @@
               </a:defRPr>
             </a:pPr>
             <a:r>
-              <a:t>消融实验</a:t>
+              <a:t>总结与展望</a:t>
             </a:r>
           </a:p>
         </p:txBody>
@@ -3414,7 +3413,7 @@
               </a:defRPr>
             </a:pPr>
             <a:r>
-              <a:t>Ablation Study</a:t>
+              <a:t>Summary</a:t>
             </a:r>
           </a:p>
         </p:txBody>
@@ -3428,7 +3427,7 @@
         <p:spPr>
           <a:xfrm>
             <a:off x="731520" y="2011680"/>
-            <a:ext cx="10515600" cy="4572000"/>
+            <a:ext cx="5029200" cy="3657600"/>
           </a:xfrm>
           <a:prstGeom prst="rect">
             <a:avLst/>
@@ -3443,171 +3442,203 @@
           <a:p>
             <a:pPr>
               <a:spcAft>
-                <a:spcPts val="800"/>
-              </a:spcAft>
-              <a:defRPr sz="1600">
-                <a:solidFill>
-                  <a:srgbClr val="FFFFFF"/>
-                </a:solidFill>
-                <a:latin typeface="Microsoft YaHei"/>
-              </a:defRPr>
-            </a:pPr>
-            <a:r>
-              <a:t>去除对比学习 (lambda=0):</a:t>
-            </a:r>
-          </a:p>
-          <a:p>
-            <a:pPr>
-              <a:spcAft>
-                <a:spcPts val="800"/>
-              </a:spcAft>
-              <a:defRPr sz="1600">
-                <a:solidFill>
-                  <a:srgbClr val="FFFFFF"/>
-                </a:solidFill>
-                <a:latin typeface="Microsoft YaHei"/>
-              </a:defRPr>
-            </a:pPr>
-            <a:r>
-              <a:t>  -&gt; 模型直接复制大部分输入，仅替换最明显有害词</a:t>
-            </a:r>
-          </a:p>
-          <a:p>
-            <a:pPr>
-              <a:spcAft>
-                <a:spcPts val="800"/>
-              </a:spcAft>
-              <a:defRPr sz="1600">
-                <a:solidFill>
-                  <a:srgbClr val="FFFFFF"/>
-                </a:solidFill>
-                <a:latin typeface="Microsoft YaHei"/>
-              </a:defRPr>
-            </a:pPr>
-            <a:r>
-              <a:t>  -&gt; 验证了有监督对比学习的必要性</a:t>
-            </a:r>
-          </a:p>
-          <a:p>
-            <a:pPr>
-              <a:spcAft>
-                <a:spcPts val="800"/>
-              </a:spcAft>
-              <a:defRPr sz="1600">
-                <a:solidFill>
-                  <a:srgbClr val="FFFFFF"/>
-                </a:solidFill>
-                <a:latin typeface="Microsoft YaHei"/>
-              </a:defRPr>
-            </a:pPr>
-          </a:p>
-          <a:p>
-            <a:pPr>
-              <a:spcAft>
-                <a:spcPts val="800"/>
-              </a:spcAft>
-              <a:defRPr sz="1600">
-                <a:solidFill>
-                  <a:srgbClr val="FFFFFF"/>
-                </a:solidFill>
-                <a:latin typeface="Microsoft YaHei"/>
-              </a:defRPr>
-            </a:pPr>
-            <a:r>
-              <a:t>去除有害词后处理:</a:t>
-            </a:r>
-          </a:p>
-          <a:p>
-            <a:pPr>
-              <a:spcAft>
-                <a:spcPts val="800"/>
-              </a:spcAft>
-              <a:defRPr sz="1600">
-                <a:solidFill>
-                  <a:srgbClr val="FFFFFF"/>
-                </a:solidFill>
-                <a:latin typeface="Microsoft YaHei"/>
-              </a:defRPr>
-            </a:pPr>
-            <a:r>
-              <a:t>  -&gt; 输出中残留少量有害词（不常见俚语和方言）</a:t>
-            </a:r>
-          </a:p>
-          <a:p>
-            <a:pPr>
-              <a:spcAft>
-                <a:spcPts val="800"/>
-              </a:spcAft>
-              <a:defRPr sz="1600">
-                <a:solidFill>
-                  <a:srgbClr val="FFFFFF"/>
-                </a:solidFill>
-                <a:latin typeface="Microsoft YaHei"/>
-              </a:defRPr>
-            </a:pPr>
-            <a:r>
-              <a:t>  -&gt; 纯神经网络方法在长尾有害表达上存在局限</a:t>
-            </a:r>
-          </a:p>
-          <a:p>
-            <a:pPr>
-              <a:spcAft>
-                <a:spcPts val="800"/>
-              </a:spcAft>
-              <a:defRPr sz="1600">
-                <a:solidFill>
-                  <a:srgbClr val="FFFFFF"/>
-                </a:solidFill>
-                <a:latin typeface="Microsoft YaHei"/>
-              </a:defRPr>
-            </a:pPr>
-          </a:p>
-          <a:p>
-            <a:pPr>
-              <a:spcAft>
-                <a:spcPts val="800"/>
-              </a:spcAft>
-              <a:defRPr sz="1600">
-                <a:solidFill>
-                  <a:srgbClr val="FFFFFF"/>
-                </a:solidFill>
-                <a:latin typeface="Microsoft YaHei"/>
-              </a:defRPr>
-            </a:pPr>
-            <a:r>
-              <a:t>使用 mT5-base 替代 mt0-large:</a:t>
-            </a:r>
-          </a:p>
-          <a:p>
-            <a:pPr>
-              <a:spcAft>
-                <a:spcPts val="800"/>
-              </a:spcAft>
-              <a:defRPr sz="1600">
-                <a:solidFill>
-                  <a:srgbClr val="FFFFFF"/>
-                </a:solidFill>
-                <a:latin typeface="Microsoft YaHei"/>
-              </a:defRPr>
-            </a:pPr>
-            <a:r>
-              <a:t>  -&gt; 对 "detoxify:" 前缀理解不足，生成质量不稳定</a:t>
-            </a:r>
-          </a:p>
-          <a:p>
-            <a:pPr>
-              <a:spcAft>
-                <a:spcPts val="800"/>
-              </a:spcAft>
-              <a:defRPr sz="1600">
-                <a:solidFill>
-                  <a:srgbClr val="FFFFFF"/>
-                </a:solidFill>
-                <a:latin typeface="Microsoft YaHei"/>
-              </a:defRPr>
-            </a:pPr>
-            <a:r>
-              <a:t>  -&gt; 验证了指令微调模型在该任务上的关键作用</a:t>
+                <a:spcPts val="600"/>
+              </a:spcAft>
+              <a:defRPr sz="1500">
+                <a:solidFill>
+                  <a:srgbClr val="00A878"/>
+                </a:solidFill>
+                <a:latin typeface="Microsoft YaHei"/>
+              </a:defRPr>
+            </a:pPr>
+            <a:r>
+              <a:t>主要贡献:</a:t>
+            </a:r>
+          </a:p>
+          <a:p>
+            <a:pPr>
+              <a:spcAft>
+                <a:spcPts val="600"/>
+              </a:spcAft>
+              <a:defRPr sz="1500">
+                <a:solidFill>
+                  <a:srgbClr val="00A878"/>
+                </a:solidFill>
+                <a:latin typeface="Microsoft YaHei"/>
+              </a:defRPr>
+            </a:pPr>
+            <a:r>
+              <a:t>  mt0-large 多语言直接去毒</a:t>
+            </a:r>
+          </a:p>
+          <a:p>
+            <a:pPr>
+              <a:spcAft>
+                <a:spcPts val="600"/>
+              </a:spcAft>
+              <a:defRPr sz="1500">
+                <a:solidFill>
+                  <a:srgbClr val="00A878"/>
+                </a:solidFill>
+                <a:latin typeface="Microsoft YaHei"/>
+              </a:defRPr>
+            </a:pPr>
+            <a:r>
+              <a:t>  有监督对比学习抑制复制</a:t>
+            </a:r>
+          </a:p>
+          <a:p>
+            <a:pPr>
+              <a:spcAft>
+                <a:spcPts val="600"/>
+              </a:spcAft>
+              <a:defRPr sz="1500">
+                <a:solidFill>
+                  <a:srgbClr val="00A878"/>
+                </a:solidFill>
+                <a:latin typeface="Microsoft YaHei"/>
+              </a:defRPr>
+            </a:pPr>
+            <a:r>
+              <a:t>  推理效率提升 15 倍</a:t>
+            </a:r>
+          </a:p>
+          <a:p>
+            <a:pPr>
+              <a:spcAft>
+                <a:spcPts val="600"/>
+              </a:spcAft>
+              <a:defRPr sz="1500">
+                <a:solidFill>
+                  <a:srgbClr val="00A878"/>
+                </a:solidFill>
+                <a:latin typeface="Microsoft YaHei"/>
+              </a:defRPr>
+            </a:pPr>
+            <a:r>
+              <a:t>  有害词后处理安全保障</a:t>
+            </a:r>
+          </a:p>
+        </p:txBody>
+      </p:sp>
+      <p:cxnSp>
+        <p:nvCxnSpPr>
+          <p:cNvPr id="6" name="Connector 5"/>
+          <p:cNvCxnSpPr/>
+          <p:nvPr/>
+        </p:nvCxnSpPr>
+        <p:spPr>
+          <a:xfrm>
+            <a:off x="5943600" y="2011680"/>
+            <a:ext cx="0" cy="3657600"/>
+          </a:xfrm>
+          <a:prstGeom prst="line">
+            <a:avLst/>
+          </a:prstGeom>
+          <a:ln w="12700">
+            <a:solidFill>
+              <a:srgbClr val="E8E8E8"/>
+            </a:solidFill>
+          </a:ln>
+        </p:spPr>
+        <p:style>
+          <a:lnRef idx="2">
+            <a:schemeClr val="accent1"/>
+          </a:lnRef>
+          <a:fillRef idx="0">
+            <a:schemeClr val="accent1"/>
+          </a:fillRef>
+          <a:effectRef idx="1">
+            <a:schemeClr val="accent1"/>
+          </a:effectRef>
+          <a:fontRef idx="minor">
+            <a:schemeClr val="tx1"/>
+          </a:fontRef>
+        </p:style>
+      </p:cxnSp>
+      <p:sp>
+        <p:nvSpPr>
+          <p:cNvPr id="7" name="TextBox 6"/>
+          <p:cNvSpPr txBox="1"/>
+          <p:nvPr/>
+        </p:nvSpPr>
+        <p:spPr>
+          <a:xfrm>
+            <a:off x="6400800" y="2011680"/>
+            <a:ext cx="5029200" cy="3657600"/>
+          </a:xfrm>
+          <a:prstGeom prst="rect">
+            <a:avLst/>
+          </a:prstGeom>
+          <a:noFill/>
+        </p:spPr>
+        <p:txBody>
+          <a:bodyPr wrap="square">
+            <a:spAutoFit/>
+          </a:bodyPr>
+          <a:lstStyle/>
+          <a:p>
+            <a:pPr>
+              <a:spcAft>
+                <a:spcPts val="600"/>
+              </a:spcAft>
+              <a:defRPr sz="1500">
+                <a:solidFill>
+                  <a:srgbClr val="FF6B35"/>
+                </a:solidFill>
+                <a:latin typeface="Microsoft YaHei"/>
+              </a:defRPr>
+            </a:pPr>
+            <a:r>
+              <a:t>未来方向:</a:t>
+            </a:r>
+          </a:p>
+          <a:p>
+            <a:pPr>
+              <a:spcAft>
+                <a:spcPts val="600"/>
+              </a:spcAft>
+              <a:defRPr sz="1500">
+                <a:solidFill>
+                  <a:srgbClr val="FF6B35"/>
+                </a:solidFill>
+                <a:latin typeface="Microsoft YaHei"/>
+              </a:defRPr>
+            </a:pPr>
+            <a:r>
+              <a:t>  RLHF 优化去毒质量</a:t>
+            </a:r>
+          </a:p>
+          <a:p>
+            <a:pPr>
+              <a:spcAft>
+                <a:spcPts val="600"/>
+              </a:spcAft>
+              <a:defRPr sz="1500">
+                <a:solidFill>
+                  <a:srgbClr val="FF6B35"/>
+                </a:solidFill>
+                <a:latin typeface="Microsoft YaHei"/>
+              </a:defRPr>
+            </a:pPr>
+            <a:r>
+              <a:t>  更大模型 + 多任务学习</a:t>
+            </a:r>
+          </a:p>
+          <a:p>
+            <a:pPr>
+              <a:spcAft>
+                <a:spcPts val="600"/>
+              </a:spcAft>
+              <a:defRPr sz="1500">
+                <a:solidFill>
+                  <a:srgbClr val="FF6B35"/>
+                </a:solidFill>
+                <a:latin typeface="Microsoft YaHei"/>
+              </a:defRPr>
+            </a:pPr>
+            <a:r>
+              <a:t>  量化部署加速推理</a:t>
             </a:r>
           </a:p>
         </p:txBody>
@@ -3646,8 +3677,8 @@
         </p:nvSpPr>
         <p:spPr>
           <a:xfrm>
-            <a:off x="731520" y="365760"/>
-            <a:ext cx="10515600" cy="914400"/>
+            <a:off x="1371600" y="2286000"/>
+            <a:ext cx="9144000" cy="1371600"/>
           </a:xfrm>
           <a:prstGeom prst="rect">
             <a:avLst/>
@@ -3660,8 +3691,8 @@
           </a:bodyPr>
           <a:lstStyle/>
           <a:p>
-            <a:pPr algn="l">
-              <a:defRPr sz="3200" b="1">
+            <a:pPr algn="ctr">
+              <a:defRPr sz="5600" b="1">
                 <a:solidFill>
                   <a:srgbClr val="FFFFFF"/>
                 </a:solidFill>
@@ -3669,56 +3700,21 @@
               </a:defRPr>
             </a:pPr>
             <a:r>
-              <a:t>总结与展望</a:t>
-            </a:r>
-          </a:p>
-        </p:txBody>
-      </p:sp>
-      <p:cxnSp>
-        <p:nvCxnSpPr>
-          <p:cNvPr id="3" name="Connector 2"/>
-          <p:cNvCxnSpPr/>
-          <p:nvPr/>
-        </p:nvCxnSpPr>
-        <p:spPr>
-          <a:xfrm>
-            <a:off x="731520" y="1188720"/>
-            <a:ext cx="3840480" cy="0"/>
-          </a:xfrm>
-          <a:prstGeom prst="line">
-            <a:avLst/>
-          </a:prstGeom>
-          <a:ln w="25400">
-            <a:solidFill>
-              <a:srgbClr val="0078D4"/>
-            </a:solidFill>
-          </a:ln>
-        </p:spPr>
-        <p:style>
-          <a:lnRef idx="2">
-            <a:schemeClr val="accent1"/>
-          </a:lnRef>
-          <a:fillRef idx="0">
-            <a:schemeClr val="accent1"/>
-          </a:fillRef>
-          <a:effectRef idx="1">
-            <a:schemeClr val="accent1"/>
-          </a:effectRef>
-          <a:fontRef idx="minor">
-            <a:schemeClr val="tx1"/>
-          </a:fontRef>
-        </p:style>
-      </p:cxnSp>
-      <p:sp>
-        <p:nvSpPr>
-          <p:cNvPr id="4" name="TextBox 3"/>
+              <a:t>谢谢!</a:t>
+            </a:r>
+          </a:p>
+        </p:txBody>
+      </p:sp>
+      <p:sp>
+        <p:nvSpPr>
+          <p:cNvPr id="3" name="TextBox 2"/>
           <p:cNvSpPr txBox="1"/>
           <p:nvPr/>
         </p:nvSpPr>
         <p:spPr>
           <a:xfrm>
-            <a:off x="731520" y="1371600"/>
-            <a:ext cx="10515600" cy="548640"/>
+            <a:off x="1371600" y="3657600"/>
+            <a:ext cx="9144000" cy="548640"/>
           </a:xfrm>
           <a:prstGeom prst="rect">
             <a:avLst/>
@@ -3731,401 +3727,6 @@
           </a:bodyPr>
           <a:lstStyle/>
           <a:p>
-            <a:pPr algn="l">
-              <a:defRPr sz="1400" b="0">
-                <a:solidFill>
-                  <a:srgbClr val="E8E8E8"/>
-                </a:solidFill>
-                <a:latin typeface="Microsoft YaHei"/>
-              </a:defRPr>
-            </a:pPr>
-            <a:r>
-              <a:t>Summary &amp; Future Work</a:t>
-            </a:r>
-          </a:p>
-        </p:txBody>
-      </p:sp>
-      <p:sp>
-        <p:nvSpPr>
-          <p:cNvPr id="5" name="TextBox 4"/>
-          <p:cNvSpPr txBox="1"/>
-          <p:nvPr/>
-        </p:nvSpPr>
-        <p:spPr>
-          <a:xfrm>
-            <a:off x="731520" y="1828800"/>
-            <a:ext cx="5029200" cy="365760"/>
-          </a:xfrm>
-          <a:prstGeom prst="rect">
-            <a:avLst/>
-          </a:prstGeom>
-          <a:noFill/>
-        </p:spPr>
-        <p:txBody>
-          <a:bodyPr wrap="square">
-            <a:spAutoFit/>
-          </a:bodyPr>
-          <a:lstStyle/>
-          <a:p>
-            <a:pPr algn="l">
-              <a:defRPr sz="1800" b="1">
-                <a:solidFill>
-                  <a:srgbClr val="00A878"/>
-                </a:solidFill>
-                <a:latin typeface="Microsoft YaHei"/>
-              </a:defRPr>
-            </a:pPr>
-            <a:r>
-              <a:t>主要贡献</a:t>
-            </a:r>
-          </a:p>
-        </p:txBody>
-      </p:sp>
-      <p:sp>
-        <p:nvSpPr>
-          <p:cNvPr id="6" name="TextBox 5"/>
-          <p:cNvSpPr txBox="1"/>
-          <p:nvPr/>
-        </p:nvSpPr>
-        <p:spPr>
-          <a:xfrm>
-            <a:off x="731520" y="2286000"/>
-            <a:ext cx="5029200" cy="2743200"/>
-          </a:xfrm>
-          <a:prstGeom prst="rect">
-            <a:avLst/>
-          </a:prstGeom>
-          <a:noFill/>
-        </p:spPr>
-        <p:txBody>
-          <a:bodyPr wrap="square">
-            <a:spAutoFit/>
-          </a:bodyPr>
-          <a:lstStyle/>
-          <a:p>
-            <a:pPr>
-              <a:spcAft>
-                <a:spcPts val="800"/>
-              </a:spcAft>
-              <a:defRPr sz="1400">
-                <a:solidFill>
-                  <a:srgbClr val="FFFFFF"/>
-                </a:solidFill>
-                <a:latin typeface="Microsoft YaHei"/>
-              </a:defRPr>
-            </a:pPr>
-            <a:r>
-              <a:t>将 mt0-large 指令微调模型引入去毒化任务</a:t>
-            </a:r>
-          </a:p>
-          <a:p>
-            <a:pPr>
-              <a:spcAft>
-                <a:spcPts val="800"/>
-              </a:spcAft>
-              <a:defRPr sz="1400">
-                <a:solidFill>
-                  <a:srgbClr val="FFFFFF"/>
-                </a:solidFill>
-                <a:latin typeface="Microsoft YaHei"/>
-              </a:defRPr>
-            </a:pPr>
-            <a:r>
-              <a:t>提出有监督对比学习，抑制简单复制</a:t>
-            </a:r>
-          </a:p>
-          <a:p>
-            <a:pPr>
-              <a:spcAft>
-                <a:spcPts val="800"/>
-              </a:spcAft>
-              <a:defRPr sz="1400">
-                <a:solidFill>
-                  <a:srgbClr val="FFFFFF"/>
-                </a:solidFill>
-                <a:latin typeface="Microsoft YaHei"/>
-              </a:defRPr>
-            </a:pPr>
-            <a:r>
-              <a:t>回译管道实现零资源语言泛化</a:t>
-            </a:r>
-          </a:p>
-          <a:p>
-            <a:pPr>
-              <a:spcAft>
-                <a:spcPts val="800"/>
-              </a:spcAft>
-              <a:defRPr sz="1400">
-                <a:solidFill>
-                  <a:srgbClr val="FFFFFF"/>
-                </a:solidFill>
-                <a:latin typeface="Microsoft YaHei"/>
-              </a:defRPr>
-            </a:pPr>
-            <a:r>
-              <a:t>有害词后处理提供可解释性保障</a:t>
-            </a:r>
-          </a:p>
-        </p:txBody>
-      </p:sp>
-      <p:sp>
-        <p:nvSpPr>
-          <p:cNvPr id="7" name="TextBox 6"/>
-          <p:cNvSpPr txBox="1"/>
-          <p:nvPr/>
-        </p:nvSpPr>
-        <p:spPr>
-          <a:xfrm>
-            <a:off x="6400800" y="1828800"/>
-            <a:ext cx="5029200" cy="365760"/>
-          </a:xfrm>
-          <a:prstGeom prst="rect">
-            <a:avLst/>
-          </a:prstGeom>
-          <a:noFill/>
-        </p:spPr>
-        <p:txBody>
-          <a:bodyPr wrap="square">
-            <a:spAutoFit/>
-          </a:bodyPr>
-          <a:lstStyle/>
-          <a:p>
-            <a:pPr algn="l">
-              <a:defRPr sz="1800" b="1">
-                <a:solidFill>
-                  <a:srgbClr val="FF6B35"/>
-                </a:solidFill>
-                <a:latin typeface="Microsoft YaHei"/>
-              </a:defRPr>
-            </a:pPr>
-            <a:r>
-              <a:t>未来方向</a:t>
-            </a:r>
-          </a:p>
-        </p:txBody>
-      </p:sp>
-      <p:sp>
-        <p:nvSpPr>
-          <p:cNvPr id="8" name="TextBox 7"/>
-          <p:cNvSpPr txBox="1"/>
-          <p:nvPr/>
-        </p:nvSpPr>
-        <p:spPr>
-          <a:xfrm>
-            <a:off x="6400800" y="2286000"/>
-            <a:ext cx="5029200" cy="3200400"/>
-          </a:xfrm>
-          <a:prstGeom prst="rect">
-            <a:avLst/>
-          </a:prstGeom>
-          <a:noFill/>
-        </p:spPr>
-        <p:txBody>
-          <a:bodyPr wrap="square">
-            <a:spAutoFit/>
-          </a:bodyPr>
-          <a:lstStyle/>
-          <a:p>
-            <a:pPr>
-              <a:spcAft>
-                <a:spcPts val="800"/>
-              </a:spcAft>
-              <a:defRPr sz="1400">
-                <a:solidFill>
-                  <a:srgbClr val="FFFFFF"/>
-                </a:solidFill>
-                <a:latin typeface="Microsoft YaHei"/>
-              </a:defRPr>
-            </a:pPr>
-            <a:r>
-              <a:t>引入 RLHF 优化去毒质量</a:t>
-            </a:r>
-          </a:p>
-          <a:p>
-            <a:pPr>
-              <a:spcAft>
-                <a:spcPts val="800"/>
-              </a:spcAft>
-              <a:defRPr sz="1400">
-                <a:solidFill>
-                  <a:srgbClr val="FFFFFF"/>
-                </a:solidFill>
-                <a:latin typeface="Microsoft YaHei"/>
-              </a:defRPr>
-            </a:pPr>
-            <a:r>
-              <a:t>探索更大模型 (mt0-xxl) + 多任务学习</a:t>
-            </a:r>
-          </a:p>
-          <a:p>
-            <a:pPr>
-              <a:spcAft>
-                <a:spcPts val="800"/>
-              </a:spcAft>
-              <a:defRPr sz="1400">
-                <a:solidFill>
-                  <a:srgbClr val="FFFFFF"/>
-                </a:solidFill>
-                <a:latin typeface="Microsoft YaHei"/>
-              </a:defRPr>
-            </a:pPr>
-            <a:r>
-              <a:t>扩展更多低资源语言 (mt0 支持 46 种)</a:t>
-            </a:r>
-          </a:p>
-          <a:p>
-            <a:pPr>
-              <a:spcAft>
-                <a:spcPts val="800"/>
-              </a:spcAft>
-              <a:defRPr sz="1400">
-                <a:solidFill>
-                  <a:srgbClr val="FFFFFF"/>
-                </a:solidFill>
-                <a:latin typeface="Microsoft YaHei"/>
-              </a:defRPr>
-            </a:pPr>
-            <a:r>
-              <a:t>量化部署 (INT8/INT4) 减少推理延迟</a:t>
-            </a:r>
-          </a:p>
-          <a:p>
-            <a:pPr>
-              <a:spcAft>
-                <a:spcPts val="800"/>
-              </a:spcAft>
-              <a:defRPr sz="1400">
-                <a:solidFill>
-                  <a:srgbClr val="FFFFFF"/>
-                </a:solidFill>
-                <a:latin typeface="Microsoft YaHei"/>
-              </a:defRPr>
-            </a:pPr>
-            <a:r>
-              <a:t>细粒度毒性分类 + 对应去毒策略</a:t>
-            </a:r>
-          </a:p>
-        </p:txBody>
-      </p:sp>
-      <p:cxnSp>
-        <p:nvCxnSpPr>
-          <p:cNvPr id="9" name="Connector 8"/>
-          <p:cNvCxnSpPr/>
-          <p:nvPr/>
-        </p:nvCxnSpPr>
-        <p:spPr>
-          <a:xfrm>
-            <a:off x="5943600" y="2011680"/>
-            <a:ext cx="0" cy="3931920"/>
-          </a:xfrm>
-          <a:prstGeom prst="line">
-            <a:avLst/>
-          </a:prstGeom>
-          <a:ln w="12700">
-            <a:solidFill>
-              <a:srgbClr val="E8E8E8"/>
-            </a:solidFill>
-          </a:ln>
-        </p:spPr>
-        <p:style>
-          <a:lnRef idx="2">
-            <a:schemeClr val="accent1"/>
-          </a:lnRef>
-          <a:fillRef idx="0">
-            <a:schemeClr val="accent1"/>
-          </a:fillRef>
-          <a:effectRef idx="1">
-            <a:schemeClr val="accent1"/>
-          </a:effectRef>
-          <a:fontRef idx="minor">
-            <a:schemeClr val="tx1"/>
-          </a:fontRef>
-        </p:style>
-      </p:cxnSp>
-    </p:spTree>
-  </p:cSld>
-  <p:clrMapOvr>
-    <a:masterClrMapping/>
-  </p:clrMapOvr>
-</p:sld>
-</file>
-
-<file path=ppt/slides/slide12.xml><?xml version="1.0" encoding="utf-8"?>
-<p:sld xmlns:a="http://schemas.openxmlformats.org/drawingml/2006/main" xmlns:p="http://schemas.openxmlformats.org/presentationml/2006/main" xmlns:r="http://schemas.openxmlformats.org/officeDocument/2006/relationships">
-  <p:cSld>
-    <p:bg>
-      <p:bgPr>
-        <a:solidFill>
-          <a:srgbClr val="1A1A2E"/>
-        </a:solidFill>
-        <a:effectLst/>
-      </p:bgPr>
-    </p:bg>
-    <p:spTree>
-      <p:nvGrpSpPr>
-        <p:cNvPr id="1" name=""/>
-        <p:cNvGrpSpPr/>
-        <p:nvPr/>
-      </p:nvGrpSpPr>
-      <p:grpSpPr/>
-      <p:sp>
-        <p:nvSpPr>
-          <p:cNvPr id="2" name="TextBox 1"/>
-          <p:cNvSpPr txBox="1"/>
-          <p:nvPr/>
-        </p:nvSpPr>
-        <p:spPr>
-          <a:xfrm>
-            <a:off x="1371600" y="2286000"/>
-            <a:ext cx="9144000" cy="1371600"/>
-          </a:xfrm>
-          <a:prstGeom prst="rect">
-            <a:avLst/>
-          </a:prstGeom>
-          <a:noFill/>
-        </p:spPr>
-        <p:txBody>
-          <a:bodyPr wrap="square">
-            <a:spAutoFit/>
-          </a:bodyPr>
-          <a:lstStyle/>
-          <a:p>
-            <a:pPr algn="ctr">
-              <a:defRPr sz="5600" b="1">
-                <a:solidFill>
-                  <a:srgbClr val="FFFFFF"/>
-                </a:solidFill>
-                <a:latin typeface="Microsoft YaHei"/>
-              </a:defRPr>
-            </a:pPr>
-            <a:r>
-              <a:t>谢谢！</a:t>
-            </a:r>
-          </a:p>
-        </p:txBody>
-      </p:sp>
-      <p:sp>
-        <p:nvSpPr>
-          <p:cNvPr id="3" name="TextBox 2"/>
-          <p:cNvSpPr txBox="1"/>
-          <p:nvPr/>
-        </p:nvSpPr>
-        <p:spPr>
-          <a:xfrm>
-            <a:off x="1371600" y="3657600"/>
-            <a:ext cx="9144000" cy="548640"/>
-          </a:xfrm>
-          <a:prstGeom prst="rect">
-            <a:avLst/>
-          </a:prstGeom>
-          <a:noFill/>
-        </p:spPr>
-        <p:txBody>
-          <a:bodyPr wrap="square">
-            <a:spAutoFit/>
-          </a:bodyPr>
-          <a:lstStyle/>
-          <a:p>
             <a:pPr algn="ctr">
               <a:defRPr sz="2800" b="0">
                 <a:solidFill>
@@ -4136,42 +3737,6 @@
             </a:pPr>
             <a:r>
               <a:t>Q &amp; A</a:t>
-            </a:r>
-          </a:p>
-        </p:txBody>
-      </p:sp>
-      <p:sp>
-        <p:nvSpPr>
-          <p:cNvPr id="4" name="TextBox 3"/>
-          <p:cNvSpPr txBox="1"/>
-          <p:nvPr/>
-        </p:nvSpPr>
-        <p:spPr>
-          <a:xfrm>
-            <a:off x="1371600" y="5029200"/>
-            <a:ext cx="9144000" cy="457200"/>
-          </a:xfrm>
-          <a:prstGeom prst="rect">
-            <a:avLst/>
-          </a:prstGeom>
-          <a:noFill/>
-        </p:spPr>
-        <p:txBody>
-          <a:bodyPr wrap="square">
-            <a:spAutoFit/>
-          </a:bodyPr>
-          <a:lstStyle/>
-          <a:p>
-            <a:pPr algn="ctr">
-              <a:defRPr sz="1600" b="0">
-                <a:solidFill>
-                  <a:srgbClr val="E8E8E8"/>
-                </a:solidFill>
-                <a:latin typeface="Microsoft YaHei"/>
-              </a:defRPr>
-            </a:pPr>
-            <a:r>
-              <a:t>基于 mt0-Large 的多语言文本去毒化系统</a:t>
             </a:r>
           </a:p>
         </p:txBody>
@@ -4304,7 +3869,7 @@
               </a:defRPr>
             </a:pPr>
             <a:r>
-              <a:t>Text Detoxification: Background &amp; Motivation</a:t>
+              <a:t>Text Detoxification</a:t>
             </a:r>
           </a:p>
         </p:txBody>
@@ -4333,7 +3898,7 @@
           <a:p>
             <a:pPr>
               <a:spcAft>
-                <a:spcPts val="800"/>
+                <a:spcPts val="600"/>
               </a:spcAft>
               <a:defRPr sz="1700">
                 <a:solidFill>
@@ -4349,7 +3914,7 @@
           <a:p>
             <a:pPr>
               <a:spcAft>
-                <a:spcPts val="800"/>
+                <a:spcPts val="600"/>
               </a:spcAft>
               <a:defRPr sz="1700">
                 <a:solidFill>
@@ -4359,13 +3924,13 @@
               </a:defRPr>
             </a:pPr>
             <a:r>
-              <a:t>有毒言论普遍存在，影响用户体验和心理健康</a:t>
-            </a:r>
-          </a:p>
-          <a:p>
-            <a:pPr>
-              <a:spcAft>
-                <a:spcPts val="800"/>
+              <a:t>有毒言论普遍存在，影响用户体验</a:t>
+            </a:r>
+          </a:p>
+          <a:p>
+            <a:pPr>
+              <a:spcAft>
+                <a:spcPts val="600"/>
               </a:spcAft>
               <a:defRPr sz="1700">
                 <a:solidFill>
@@ -4374,14 +3939,11 @@
                 <a:latin typeface="Microsoft YaHei"/>
               </a:defRPr>
             </a:pPr>
-            <a:r>
-              <a:t>自动文本去毒化：将有毒文本改写为中性、文明的表达</a:t>
-            </a:r>
-          </a:p>
-          <a:p>
-            <a:pPr>
-              <a:spcAft>
-                <a:spcPts val="800"/>
+          </a:p>
+          <a:p>
+            <a:pPr>
+              <a:spcAft>
+                <a:spcPts val="600"/>
               </a:spcAft>
               <a:defRPr sz="1700">
                 <a:solidFill>
@@ -4391,13 +3953,13 @@
               </a:defRPr>
             </a:pPr>
             <a:r>
-              <a:t>需要同时满足：清除有害内容、保留语义、维持流畅性</a:t>
-            </a:r>
-          </a:p>
-          <a:p>
-            <a:pPr>
-              <a:spcAft>
-                <a:spcPts val="800"/>
+              <a:t>自动文本去毒化：改写为中性文明表达</a:t>
+            </a:r>
+          </a:p>
+          <a:p>
+            <a:pPr>
+              <a:spcAft>
+                <a:spcPts val="600"/>
               </a:spcAft>
               <a:defRPr sz="1700">
                 <a:solidFill>
@@ -4407,7 +3969,36 @@
               </a:defRPr>
             </a:pPr>
             <a:r>
-              <a:t>覆盖 15 种语言的多语言去毒任务</a:t>
+              <a:t>需同时满足：清除有害 / 保留语义 / 维持流畅</a:t>
+            </a:r>
+          </a:p>
+          <a:p>
+            <a:pPr>
+              <a:spcAft>
+                <a:spcPts val="600"/>
+              </a:spcAft>
+              <a:defRPr sz="1700">
+                <a:solidFill>
+                  <a:srgbClr val="FFFFFF"/>
+                </a:solidFill>
+                <a:latin typeface="Microsoft YaHei"/>
+              </a:defRPr>
+            </a:pPr>
+          </a:p>
+          <a:p>
+            <a:pPr>
+              <a:spcAft>
+                <a:spcPts val="600"/>
+              </a:spcAft>
+              <a:defRPr sz="1700">
+                <a:solidFill>
+                  <a:srgbClr val="FFFFFF"/>
+                </a:solidFill>
+                <a:latin typeface="Microsoft YaHei"/>
+              </a:defRPr>
+            </a:pPr>
+            <a:r>
+              <a:t>覆盖 15 种语言</a:t>
             </a:r>
           </a:p>
         </p:txBody>
@@ -4436,7 +4027,7 @@
           <a:p>
             <a:pPr>
               <a:spcAft>
-                <a:spcPts val="800"/>
+                <a:spcPts val="600"/>
               </a:spcAft>
               <a:defRPr sz="1400">
                 <a:solidFill>
@@ -4446,13 +4037,13 @@
               </a:defRPr>
             </a:pPr>
             <a:r>
-              <a:t>Example 示例</a:t>
-            </a:r>
-          </a:p>
-          <a:p>
-            <a:pPr>
-              <a:spcAft>
-                <a:spcPts val="800"/>
+              <a:t>示例</a:t>
+            </a:r>
+          </a:p>
+          <a:p>
+            <a:pPr>
+              <a:spcAft>
+                <a:spcPts val="600"/>
               </a:spcAft>
               <a:defRPr sz="1400">
                 <a:solidFill>
@@ -4465,7 +4056,7 @@
           <a:p>
             <a:pPr>
               <a:spcAft>
-                <a:spcPts val="800"/>
+                <a:spcPts val="600"/>
               </a:spcAft>
               <a:defRPr sz="1400">
                 <a:solidFill>
@@ -4481,7 +4072,7 @@
           <a:p>
             <a:pPr>
               <a:spcAft>
-                <a:spcPts val="800"/>
+                <a:spcPts val="600"/>
               </a:spcAft>
               <a:defRPr sz="1400">
                 <a:solidFill>
@@ -4490,11 +4081,14 @@
                 <a:latin typeface="Microsoft YaHei"/>
               </a:defRPr>
             </a:pPr>
-          </a:p>
-          <a:p>
-            <a:pPr>
-              <a:spcAft>
-                <a:spcPts val="800"/>
+            <a:r>
+              <a:t>-&gt; "you made a mistake"</a:t>
+            </a:r>
+          </a:p>
+          <a:p>
+            <a:pPr>
+              <a:spcAft>
+                <a:spcPts val="600"/>
               </a:spcAft>
               <a:defRPr sz="1400">
                 <a:solidFill>
@@ -4503,14 +4097,11 @@
                 <a:latin typeface="Microsoft YaHei"/>
               </a:defRPr>
             </a:pPr>
-            <a:r>
-              <a:t>Neutral: "you made a mistake"</a:t>
-            </a:r>
-          </a:p>
-          <a:p>
-            <a:pPr>
-              <a:spcAft>
-                <a:spcPts val="800"/>
+          </a:p>
+          <a:p>
+            <a:pPr>
+              <a:spcAft>
+                <a:spcPts val="600"/>
               </a:spcAft>
               <a:defRPr sz="1400">
                 <a:solidFill>
@@ -4519,11 +4110,14 @@
                 <a:latin typeface="Microsoft YaHei"/>
               </a:defRPr>
             </a:pPr>
-          </a:p>
-          <a:p>
-            <a:pPr>
-              <a:spcAft>
-                <a:spcPts val="800"/>
+            <a:r>
+              <a:t>Toxic: "fuck minimum security"</a:t>
+            </a:r>
+          </a:p>
+          <a:p>
+            <a:pPr>
+              <a:spcAft>
+                <a:spcPts val="600"/>
               </a:spcAft>
               <a:defRPr sz="1400">
                 <a:solidFill>
@@ -4533,36 +4127,7 @@
               </a:defRPr>
             </a:pPr>
             <a:r>
-              <a:t>Toxic: "fuck minimum security, put him in real prison"</a:t>
-            </a:r>
-          </a:p>
-          <a:p>
-            <a:pPr>
-              <a:spcAft>
-                <a:spcPts val="800"/>
-              </a:spcAft>
-              <a:defRPr sz="1400">
-                <a:solidFill>
-                  <a:srgbClr val="FF6B35"/>
-                </a:solidFill>
-                <a:latin typeface="Microsoft YaHei"/>
-              </a:defRPr>
-            </a:pPr>
-          </a:p>
-          <a:p>
-            <a:pPr>
-              <a:spcAft>
-                <a:spcPts val="800"/>
-              </a:spcAft>
-              <a:defRPr sz="1400">
-                <a:solidFill>
-                  <a:srgbClr val="FF6B35"/>
-                </a:solidFill>
-                <a:latin typeface="Microsoft YaHei"/>
-              </a:defRPr>
-            </a:pPr>
-            <a:r>
-              <a:t>Neutral: "put him in real prison"</a:t>
+              <a:t>-&gt; "put him in real prison"</a:t>
             </a:r>
           </a:p>
         </p:txBody>
@@ -4724,7 +4289,7 @@
           <a:p>
             <a:pPr>
               <a:spcAft>
-                <a:spcPts val="800"/>
+                <a:spcPts val="600"/>
               </a:spcAft>
               <a:defRPr sz="1700">
                 <a:solidFill>
@@ -4734,13 +4299,13 @@
               </a:defRPr>
             </a:pPr>
             <a:r>
-              <a:t>挑战一：词汇重叠度高 —— 有毒文本与中性文本在某些语言中词汇重叠可达 80%，模型容易退化为简单复制</a:t>
-            </a:r>
-          </a:p>
-          <a:p>
-            <a:pPr>
-              <a:spcAft>
-                <a:spcPts val="800"/>
+              <a:t>挑战一：词汇重叠度高达 80%，模型容易退化为简单复制</a:t>
+            </a:r>
+          </a:p>
+          <a:p>
+            <a:pPr>
+              <a:spcAft>
+                <a:spcPts val="600"/>
               </a:spcAft>
               <a:defRPr sz="1700">
                 <a:solidFill>
@@ -4753,7 +4318,7 @@
           <a:p>
             <a:pPr>
               <a:spcAft>
-                <a:spcPts val="800"/>
+                <a:spcPts val="600"/>
               </a:spcAft>
               <a:defRPr sz="1700">
                 <a:solidFill>
@@ -4763,13 +4328,13 @@
               </a:defRPr>
             </a:pPr>
             <a:r>
-              <a:t>挑战二：语言和文化依赖性 —— 同一词汇在不同语言中的毒性程度差异巨大（如 "pig" 在英语中可指警察，在中文中无此义）</a:t>
-            </a:r>
-          </a:p>
-          <a:p>
-            <a:pPr>
-              <a:spcAft>
-                <a:spcPts val="800"/>
+              <a:t>挑战二：不同语言中毒性表达差异巨大</a:t>
+            </a:r>
+          </a:p>
+          <a:p>
+            <a:pPr>
+              <a:spcAft>
+                <a:spcPts val="600"/>
               </a:spcAft>
               <a:defRPr sz="1700">
                 <a:solidFill>
@@ -4782,7 +4347,7 @@
           <a:p>
             <a:pPr>
               <a:spcAft>
-                <a:spcPts val="800"/>
+                <a:spcPts val="600"/>
               </a:spcAft>
               <a:defRPr sz="1700">
                 <a:solidFill>
@@ -4792,13 +4357,13 @@
               </a:defRPr>
             </a:pPr>
             <a:r>
-              <a:t>挑战三：多目标权衡 —— 去毒化需同时满足语义保留、语法正确、流畅自然三个目标</a:t>
-            </a:r>
-          </a:p>
-          <a:p>
-            <a:pPr>
-              <a:spcAft>
-                <a:spcPts val="800"/>
+              <a:t>挑战三：多目标权衡 (清除有害 + 语义保留 + 流畅自然)</a:t>
+            </a:r>
+          </a:p>
+          <a:p>
+            <a:pPr>
+              <a:spcAft>
+                <a:spcPts val="600"/>
               </a:spcAft>
               <a:defRPr sz="1700">
                 <a:solidFill>
@@ -4811,7 +4376,7 @@
           <a:p>
             <a:pPr>
               <a:spcAft>
-                <a:spcPts val="800"/>
+                <a:spcPts val="600"/>
               </a:spcAft>
               <a:defRPr sz="1700">
                 <a:solidFill>
@@ -4821,7 +4386,7 @@
               </a:defRPr>
             </a:pPr>
             <a:r>
-              <a:t>挑战四：低资源语言泛化 —— 训练数据仅覆盖 9 种语言，需向未见过的语言泛化</a:t>
+              <a:t>挑战四：推理效率 —— 传统回译管道极慢 (每条 ~38s)，9000 条需 50h</a:t>
             </a:r>
           </a:p>
         </p:txBody>
@@ -4883,7 +4448,7 @@
               </a:defRPr>
             </a:pPr>
             <a:r>
-              <a:t>相关工作</a:t>
+              <a:t>系统架构</a:t>
             </a:r>
           </a:p>
         </p:txBody>
@@ -4954,7 +4519,7 @@
               </a:defRPr>
             </a:pPr>
             <a:r>
-              <a:t>Related Work</a:t>
+              <a:t>System Architecture (直接去毒)</a:t>
             </a:r>
           </a:p>
         </p:txBody>
@@ -4967,8 +4532,8 @@
         </p:nvSpPr>
         <p:spPr>
           <a:xfrm>
-            <a:off x="731520" y="1828800"/>
-            <a:ext cx="3474720" cy="457200"/>
+            <a:off x="731520" y="2286000"/>
+            <a:ext cx="10515600" cy="3200400"/>
           </a:xfrm>
           <a:prstGeom prst="rect">
             <a:avLst/>
@@ -4981,47 +4546,11 @@
           </a:bodyPr>
           <a:lstStyle/>
           <a:p>
-            <a:pPr algn="l">
-              <a:defRPr sz="1800" b="1">
-                <a:solidFill>
-                  <a:srgbClr val="0078D4"/>
-                </a:solidFill>
-                <a:latin typeface="Microsoft YaHei"/>
-              </a:defRPr>
-            </a:pPr>
-            <a:r>
-              <a:t>文本去毒化方法</a:t>
-            </a:r>
-          </a:p>
-        </p:txBody>
-      </p:sp>
-      <p:sp>
-        <p:nvSpPr>
-          <p:cNvPr id="6" name="TextBox 5"/>
-          <p:cNvSpPr txBox="1"/>
-          <p:nvPr/>
-        </p:nvSpPr>
-        <p:spPr>
-          <a:xfrm>
-            <a:off x="731520" y="2560320"/>
-            <a:ext cx="3474720" cy="3657600"/>
-          </a:xfrm>
-          <a:prstGeom prst="rect">
-            <a:avLst/>
-          </a:prstGeom>
-          <a:noFill/>
-        </p:spPr>
-        <p:txBody>
-          <a:bodyPr wrap="square">
-            <a:spAutoFit/>
-          </a:bodyPr>
-          <a:lstStyle/>
-          <a:p>
-            <a:pPr>
-              <a:spcAft>
-                <a:spcPts val="1200"/>
-              </a:spcAft>
-              <a:defRPr sz="1300">
+            <a:pPr>
+              <a:spcAft>
+                <a:spcPts val="600"/>
+              </a:spcAft>
+              <a:defRPr sz="1600">
                 <a:solidFill>
                   <a:srgbClr val="FFFFFF"/>
                 </a:solidFill>
@@ -5029,31 +4558,28 @@
               </a:defRPr>
             </a:pPr>
             <a:r>
-              <a:t>基于词典：检测 + 删除/替换有害词汇</a:t>
-            </a:r>
-          </a:p>
-          <a:p>
-            <a:pPr>
-              <a:spcAft>
-                <a:spcPts val="1200"/>
-              </a:spcAft>
-              <a:defRPr sz="1300">
+              <a:t>所有 15 种语言统一流程:</a:t>
+            </a:r>
+          </a:p>
+          <a:p>
+            <a:pPr>
+              <a:spcAft>
+                <a:spcPts val="600"/>
+              </a:spcAft>
+              <a:defRPr sz="1600">
                 <a:solidFill>
                   <a:srgbClr val="FFFFFF"/>
                 </a:solidFill>
                 <a:latin typeface="Microsoft YaHei"/>
               </a:defRPr>
             </a:pPr>
-            <a:r>
-              <a:t>基于神经网络：Seq2Seq 端到端改写</a:t>
-            </a:r>
-          </a:p>
-          <a:p>
-            <a:pPr>
-              <a:spcAft>
-                <a:spcPts val="1200"/>
-              </a:spcAft>
-              <a:defRPr sz="1300">
+          </a:p>
+          <a:p>
+            <a:pPr>
+              <a:spcAft>
+                <a:spcPts val="600"/>
+              </a:spcAft>
+              <a:defRPr sz="1600">
                 <a:solidFill>
                   <a:srgbClr val="FFFFFF"/>
                 </a:solidFill>
@@ -5061,90 +4587,28 @@
               </a:defRPr>
             </a:pPr>
             <a:r>
-              <a:t>ParaDetox 基准数据集 (Dale et al., 2021)</a:t>
-            </a:r>
-          </a:p>
-          <a:p>
-            <a:pPr>
-              <a:spcAft>
-                <a:spcPts val="1200"/>
-              </a:spcAft>
-              <a:defRPr sz="1300">
+              <a:t>  Toxic Text --&gt; [mt0-large + LoRA 去毒模型] --&gt; [有害词后处理] --&gt; Neutral Text</a:t>
+            </a:r>
+          </a:p>
+          <a:p>
+            <a:pPr>
+              <a:spcAft>
+                <a:spcPts val="600"/>
+              </a:spcAft>
+              <a:defRPr sz="1600">
                 <a:solidFill>
                   <a:srgbClr val="FFFFFF"/>
                 </a:solidFill>
                 <a:latin typeface="Microsoft YaHei"/>
               </a:defRPr>
             </a:pPr>
-            <a:r>
-              <a:t>GPT-3.5 零样本去毒 (Hallinan et al., 2023)</a:t>
-            </a:r>
-          </a:p>
-        </p:txBody>
-      </p:sp>
-      <p:sp>
-        <p:nvSpPr>
-          <p:cNvPr id="7" name="TextBox 6"/>
-          <p:cNvSpPr txBox="1"/>
-          <p:nvPr/>
-        </p:nvSpPr>
-        <p:spPr>
-          <a:xfrm>
-            <a:off x="4480559" y="1828800"/>
-            <a:ext cx="3474720" cy="457200"/>
-          </a:xfrm>
-          <a:prstGeom prst="rect">
-            <a:avLst/>
-          </a:prstGeom>
-          <a:noFill/>
-        </p:spPr>
-        <p:txBody>
-          <a:bodyPr wrap="square">
-            <a:spAutoFit/>
-          </a:bodyPr>
-          <a:lstStyle/>
-          <a:p>
-            <a:pPr algn="l">
-              <a:defRPr sz="1800" b="1">
-                <a:solidFill>
-                  <a:srgbClr val="0078D4"/>
-                </a:solidFill>
-                <a:latin typeface="Microsoft YaHei"/>
-              </a:defRPr>
-            </a:pPr>
-            <a:r>
-              <a:t>参数高效微调</a:t>
-            </a:r>
-          </a:p>
-        </p:txBody>
-      </p:sp>
-      <p:sp>
-        <p:nvSpPr>
-          <p:cNvPr id="8" name="TextBox 7"/>
-          <p:cNvSpPr txBox="1"/>
-          <p:nvPr/>
-        </p:nvSpPr>
-        <p:spPr>
-          <a:xfrm>
-            <a:off x="4480559" y="2560320"/>
-            <a:ext cx="3474720" cy="3657600"/>
-          </a:xfrm>
-          <a:prstGeom prst="rect">
-            <a:avLst/>
-          </a:prstGeom>
-          <a:noFill/>
-        </p:spPr>
-        <p:txBody>
-          <a:bodyPr wrap="square">
-            <a:spAutoFit/>
-          </a:bodyPr>
-          <a:lstStyle/>
-          <a:p>
-            <a:pPr>
-              <a:spcAft>
-                <a:spcPts val="1200"/>
-              </a:spcAft>
-              <a:defRPr sz="1300">
+          </a:p>
+          <a:p>
+            <a:pPr>
+              <a:spcAft>
+                <a:spcPts val="600"/>
+              </a:spcAft>
+              <a:defRPr sz="1600">
                 <a:solidFill>
                   <a:srgbClr val="FFFFFF"/>
                 </a:solidFill>
@@ -5152,31 +4616,28 @@
               </a:defRPr>
             </a:pPr>
             <a:r>
-              <a:t>全参数微调：成本高、存储大</a:t>
-            </a:r>
-          </a:p>
-          <a:p>
-            <a:pPr>
-              <a:spcAft>
-                <a:spcPts val="1200"/>
-              </a:spcAft>
-              <a:defRPr sz="1300">
+              <a:t>核心思路：利用 mt0-large 的多语言指令微调能力，无需外部翻译模型</a:t>
+            </a:r>
+          </a:p>
+          <a:p>
+            <a:pPr>
+              <a:spcAft>
+                <a:spcPts val="600"/>
+              </a:spcAft>
+              <a:defRPr sz="1600">
                 <a:solidFill>
                   <a:srgbClr val="FFFFFF"/>
                 </a:solidFill>
                 <a:latin typeface="Microsoft YaHei"/>
               </a:defRPr>
             </a:pPr>
-            <a:r>
-              <a:t>LoRA: 低秩分解 W = BA (Hu et al., 2022)</a:t>
-            </a:r>
-          </a:p>
-          <a:p>
-            <a:pPr>
-              <a:spcAft>
-                <a:spcPts val="1200"/>
-              </a:spcAft>
-              <a:defRPr sz="1300">
+          </a:p>
+          <a:p>
+            <a:pPr>
+              <a:spcAft>
+                <a:spcPts val="600"/>
+              </a:spcAft>
+              <a:defRPr sz="1600">
                 <a:solidFill>
                   <a:srgbClr val="FFFFFF"/>
                 </a:solidFill>
@@ -5184,90 +4645,28 @@
               </a:defRPr>
             </a:pPr>
             <a:r>
-              <a:t>仅训练 1.5% 参数，无推理延迟</a:t>
-            </a:r>
-          </a:p>
-          <a:p>
-            <a:pPr>
-              <a:spcAft>
-                <a:spcPts val="1200"/>
-              </a:spcAft>
-              <a:defRPr sz="1300">
+              <a:t>对比学习隐式跨语言：batch 内多语言混合 -&gt; 语言无关的"中毒性"语义空间</a:t>
+            </a:r>
+          </a:p>
+          <a:p>
+            <a:pPr>
+              <a:spcAft>
+                <a:spcPts val="600"/>
+              </a:spcAft>
+              <a:defRPr sz="1600">
                 <a:solidFill>
                   <a:srgbClr val="FFFFFF"/>
                 </a:solidFill>
                 <a:latin typeface="Microsoft YaHei"/>
               </a:defRPr>
             </a:pPr>
-            <a:r>
-              <a:t>本项目：r=32, 目标 [q,k,v,o]</a:t>
-            </a:r>
-          </a:p>
-        </p:txBody>
-      </p:sp>
-      <p:sp>
-        <p:nvSpPr>
-          <p:cNvPr id="9" name="TextBox 8"/>
-          <p:cNvSpPr txBox="1"/>
-          <p:nvPr/>
-        </p:nvSpPr>
-        <p:spPr>
-          <a:xfrm>
-            <a:off x="8229600" y="1828800"/>
-            <a:ext cx="3474720" cy="457200"/>
-          </a:xfrm>
-          <a:prstGeom prst="rect">
-            <a:avLst/>
-          </a:prstGeom>
-          <a:noFill/>
-        </p:spPr>
-        <p:txBody>
-          <a:bodyPr wrap="square">
-            <a:spAutoFit/>
-          </a:bodyPr>
-          <a:lstStyle/>
-          <a:p>
-            <a:pPr algn="l">
-              <a:defRPr sz="1800" b="1">
-                <a:solidFill>
-                  <a:srgbClr val="0078D4"/>
-                </a:solidFill>
-                <a:latin typeface="Microsoft YaHei"/>
-              </a:defRPr>
-            </a:pPr>
-            <a:r>
-              <a:t>多语言模型</a:t>
-            </a:r>
-          </a:p>
-        </p:txBody>
-      </p:sp>
-      <p:sp>
-        <p:nvSpPr>
-          <p:cNvPr id="10" name="TextBox 9"/>
-          <p:cNvSpPr txBox="1"/>
-          <p:nvPr/>
-        </p:nvSpPr>
-        <p:spPr>
-          <a:xfrm>
-            <a:off x="8229600" y="2560320"/>
-            <a:ext cx="3474720" cy="3657600"/>
-          </a:xfrm>
-          <a:prstGeom prst="rect">
-            <a:avLst/>
-          </a:prstGeom>
-          <a:noFill/>
-        </p:spPr>
-        <p:txBody>
-          <a:bodyPr wrap="square">
-            <a:spAutoFit/>
-          </a:bodyPr>
-          <a:lstStyle/>
-          <a:p>
-            <a:pPr>
-              <a:spcAft>
-                <a:spcPts val="1200"/>
-              </a:spcAft>
-              <a:defRPr sz="1300">
+          </a:p>
+          <a:p>
+            <a:pPr>
+              <a:spcAft>
+                <a:spcPts val="600"/>
+              </a:spcAft>
+              <a:defRPr sz="1600">
                 <a:solidFill>
                   <a:srgbClr val="FFFFFF"/>
                 </a:solidFill>
@@ -5275,55 +4674,7 @@
               </a:defRPr>
             </a:pPr>
             <a:r>
-              <a:t>mT5: 101 语言预训练 (Xue et al., 2021)</a:t>
-            </a:r>
-          </a:p>
-          <a:p>
-            <a:pPr>
-              <a:spcAft>
-                <a:spcPts val="1200"/>
-              </a:spcAft>
-              <a:defRPr sz="1300">
-                <a:solidFill>
-                  <a:srgbClr val="FFFFFF"/>
-                </a:solidFill>
-                <a:latin typeface="Microsoft YaHei"/>
-              </a:defRPr>
-            </a:pPr>
-            <a:r>
-              <a:t>mt0: mT5 + 多语言指令微调 (xP3)</a:t>
-            </a:r>
-          </a:p>
-          <a:p>
-            <a:pPr>
-              <a:spcAft>
-                <a:spcPts val="1200"/>
-              </a:spcAft>
-              <a:defRPr sz="1300">
-                <a:solidFill>
-                  <a:srgbClr val="FFFFFF"/>
-                </a:solidFill>
-                <a:latin typeface="Microsoft YaHei"/>
-              </a:defRPr>
-            </a:pPr>
-            <a:r>
-              <a:t>NLLB-200: 200 种语言翻译 (Meta, 2022)</a:t>
-            </a:r>
-          </a:p>
-          <a:p>
-            <a:pPr>
-              <a:spcAft>
-                <a:spcPts val="1200"/>
-              </a:spcAft>
-              <a:defRPr sz="1300">
-                <a:solidFill>
-                  <a:srgbClr val="FFFFFF"/>
-                </a:solidFill>
-                <a:latin typeface="Microsoft YaHei"/>
-              </a:defRPr>
-            </a:pPr>
-            <a:r>
-              <a:t>本项目：mt0-large + NLLB-600M</a:t>
+              <a:t>效率提升：每条 ~2s (vs 翻译管道 ~38s)，9000 条 5h (vs 50h)</a:t>
             </a:r>
           </a:p>
         </p:txBody>
@@ -5385,7 +4736,7 @@
               </a:defRPr>
             </a:pPr>
             <a:r>
-              <a:t>系统架构</a:t>
+              <a:t>去毒模型设计</a:t>
             </a:r>
           </a:p>
         </p:txBody>
@@ -5456,7 +4807,7 @@
               </a:defRPr>
             </a:pPr>
             <a:r>
-              <a:t>System Architecture Overview</a:t>
+              <a:t>mt0-large + LoRA</a:t>
             </a:r>
           </a:p>
         </p:txBody>
@@ -5470,7 +4821,7 @@
         <p:spPr>
           <a:xfrm>
             <a:off x="731520" y="2011680"/>
-            <a:ext cx="10515600" cy="365760"/>
+            <a:ext cx="5029200" cy="3200400"/>
           </a:xfrm>
           <a:prstGeom prst="rect">
             <a:avLst/>
@@ -5483,16 +4834,80 @@
           </a:bodyPr>
           <a:lstStyle/>
           <a:p>
-            <a:pPr algn="l">
-              <a:defRPr sz="1600" b="1">
-                <a:solidFill>
-                  <a:srgbClr val="0078D4"/>
-                </a:solidFill>
-                <a:latin typeface="Microsoft YaHei"/>
-              </a:defRPr>
-            </a:pPr>
-            <a:r>
-              <a:t>训练语言 (9种: am,ar,de,en,es,hi,ru,uk,zh)</a:t>
+            <a:pPr>
+              <a:spcAft>
+                <a:spcPts val="600"/>
+              </a:spcAft>
+              <a:defRPr sz="1500">
+                <a:solidFill>
+                  <a:srgbClr val="FFFFFF"/>
+                </a:solidFill>
+                <a:latin typeface="Microsoft YaHei"/>
+              </a:defRPr>
+            </a:pPr>
+            <a:r>
+              <a:t>基座: bigscience/mt0-large (1.2B)</a:t>
+            </a:r>
+          </a:p>
+          <a:p>
+            <a:pPr>
+              <a:spcAft>
+                <a:spcPts val="600"/>
+              </a:spcAft>
+              <a:defRPr sz="1500">
+                <a:solidFill>
+                  <a:srgbClr val="FFFFFF"/>
+                </a:solidFill>
+                <a:latin typeface="Microsoft YaHei"/>
+              </a:defRPr>
+            </a:pPr>
+            <a:r>
+              <a:t>Encoder-Decoder Transformer</a:t>
+            </a:r>
+          </a:p>
+          <a:p>
+            <a:pPr>
+              <a:spcAft>
+                <a:spcPts val="600"/>
+              </a:spcAft>
+              <a:defRPr sz="1500">
+                <a:solidFill>
+                  <a:srgbClr val="FFFFFF"/>
+                </a:solidFill>
+                <a:latin typeface="Microsoft YaHei"/>
+              </a:defRPr>
+            </a:pPr>
+            <a:r>
+              <a:t>d=1024, 16 heads</a:t>
+            </a:r>
+          </a:p>
+          <a:p>
+            <a:pPr>
+              <a:spcAft>
+                <a:spcPts val="600"/>
+              </a:spcAft>
+              <a:defRPr sz="1500">
+                <a:solidFill>
+                  <a:srgbClr val="FFFFFF"/>
+                </a:solidFill>
+                <a:latin typeface="Microsoft YaHei"/>
+              </a:defRPr>
+            </a:pPr>
+          </a:p>
+          <a:p>
+            <a:pPr>
+              <a:spcAft>
+                <a:spcPts val="600"/>
+              </a:spcAft>
+              <a:defRPr sz="1500">
+                <a:solidFill>
+                  <a:srgbClr val="FFFFFF"/>
+                </a:solidFill>
+                <a:latin typeface="Microsoft YaHei"/>
+              </a:defRPr>
+            </a:pPr>
+            <a:r>
+              <a:t>输入: "detoxify: {有毒文本}"</a:t>
             </a:r>
           </a:p>
         </p:txBody>
@@ -5505,8 +4920,8 @@
         </p:nvSpPr>
         <p:spPr>
           <a:xfrm>
-            <a:off x="1371600" y="2468880"/>
-            <a:ext cx="9144000" cy="914400"/>
+            <a:off x="6400800" y="2011680"/>
+            <a:ext cx="5029200" cy="3200400"/>
           </a:xfrm>
           <a:prstGeom prst="rect">
             <a:avLst/>
@@ -5521,137 +4936,107 @@
           <a:p>
             <a:pPr>
               <a:spcAft>
-                <a:spcPts val="400"/>
+                <a:spcPts val="600"/>
               </a:spcAft>
               <a:defRPr sz="1500">
                 <a:solidFill>
-                  <a:srgbClr val="FFFFFF"/>
-                </a:solidFill>
-                <a:latin typeface="Microsoft YaHei"/>
-              </a:defRPr>
-            </a:pPr>
-            <a:r>
-              <a:t>Toxic Text  --&gt;  [mt0-large + LoRA 去毒模型]  --&gt;  [有害词后处理]  --&gt;  Neutral Text</a:t>
-            </a:r>
-          </a:p>
-        </p:txBody>
-      </p:sp>
-      <p:sp>
-        <p:nvSpPr>
-          <p:cNvPr id="7" name="TextBox 6"/>
-          <p:cNvSpPr txBox="1"/>
-          <p:nvPr/>
-        </p:nvSpPr>
-        <p:spPr>
-          <a:xfrm>
-            <a:off x="731520" y="3474720"/>
-            <a:ext cx="10515600" cy="365760"/>
-          </a:xfrm>
-          <a:prstGeom prst="rect">
-            <a:avLst/>
-          </a:prstGeom>
-          <a:noFill/>
-        </p:spPr>
-        <p:txBody>
-          <a:bodyPr wrap="square">
-            <a:spAutoFit/>
-          </a:bodyPr>
-          <a:lstStyle/>
-          <a:p>
-            <a:pPr algn="l">
-              <a:defRPr sz="1600" b="1">
-                <a:solidFill>
-                  <a:srgbClr val="00A878"/>
-                </a:solidFill>
-                <a:latin typeface="Microsoft YaHei"/>
-              </a:defRPr>
-            </a:pPr>
-            <a:r>
-              <a:t>零资源语言 (6种: fr,he,it,ja,tt,hin)</a:t>
-            </a:r>
-          </a:p>
-        </p:txBody>
-      </p:sp>
-      <p:sp>
-        <p:nvSpPr>
-          <p:cNvPr id="8" name="TextBox 7"/>
-          <p:cNvSpPr txBox="1"/>
-          <p:nvPr/>
-        </p:nvSpPr>
-        <p:spPr>
-          <a:xfrm>
-            <a:off x="1371600" y="3931920"/>
-            <a:ext cx="9144000" cy="2286000"/>
-          </a:xfrm>
-          <a:prstGeom prst="rect">
-            <a:avLst/>
-          </a:prstGeom>
-          <a:noFill/>
-        </p:spPr>
-        <p:txBody>
-          <a:bodyPr wrap="square">
-            <a:spAutoFit/>
-          </a:bodyPr>
-          <a:lstStyle/>
-          <a:p>
-            <a:pPr>
-              <a:spcAft>
-                <a:spcPts val="400"/>
-              </a:spcAft>
-              <a:defRPr sz="1400">
-                <a:solidFill>
-                  <a:srgbClr val="FFFFFF"/>
-                </a:solidFill>
-                <a:latin typeface="Microsoft YaHei"/>
-              </a:defRPr>
-            </a:pPr>
-            <a:r>
-              <a:t>Toxic Text  --&gt;  [NLLB 翻译]  --&gt;  English Toxic  --&gt;  [mt0-large 去毒]</a:t>
-            </a:r>
-          </a:p>
-          <a:p>
-            <a:pPr>
-              <a:spcAft>
-                <a:spcPts val="400"/>
-              </a:spcAft>
-              <a:defRPr sz="1400">
-                <a:solidFill>
-                  <a:srgbClr val="FFFFFF"/>
-                </a:solidFill>
-                <a:latin typeface="Microsoft YaHei"/>
-              </a:defRPr>
-            </a:pPr>
-            <a:r>
-              <a:t>   --&gt;  English Neutral  --&gt;  [NLLB 回译]  --&gt;  [有害词后处理]  --&gt;  Neutral Text</a:t>
-            </a:r>
-          </a:p>
-          <a:p>
-            <a:pPr>
-              <a:spcAft>
-                <a:spcPts val="400"/>
-              </a:spcAft>
-              <a:defRPr sz="1400">
-                <a:solidFill>
-                  <a:srgbClr val="FFFFFF"/>
-                </a:solidFill>
-                <a:latin typeface="Microsoft YaHei"/>
-              </a:defRPr>
-            </a:pPr>
-          </a:p>
-          <a:p>
-            <a:pPr>
-              <a:spcAft>
-                <a:spcPts val="400"/>
-              </a:spcAft>
-              <a:defRPr sz="1400">
-                <a:solidFill>
-                  <a:srgbClr val="FFFFFF"/>
-                </a:solidFill>
-                <a:latin typeface="Microsoft YaHei"/>
-              </a:defRPr>
-            </a:pPr>
-            <a:r>
-              <a:t>三个核心模块：mt0-large + LoRA | NLLB-200 回译管道 | 多语言有害词后处理</a:t>
+                  <a:srgbClr val="FF6B35"/>
+                </a:solidFill>
+                <a:latin typeface="Microsoft YaHei"/>
+              </a:defRPr>
+            </a:pPr>
+            <a:r>
+              <a:t>LoRA: r=32, alpha=64</a:t>
+            </a:r>
+          </a:p>
+          <a:p>
+            <a:pPr>
+              <a:spcAft>
+                <a:spcPts val="600"/>
+              </a:spcAft>
+              <a:defRPr sz="1500">
+                <a:solidFill>
+                  <a:srgbClr val="FF6B35"/>
+                </a:solidFill>
+                <a:latin typeface="Microsoft YaHei"/>
+              </a:defRPr>
+            </a:pPr>
+            <a:r>
+              <a:t>目标: [q,k,v,o], 1.51% 参数</a:t>
+            </a:r>
+          </a:p>
+          <a:p>
+            <a:pPr>
+              <a:spcAft>
+                <a:spcPts val="600"/>
+              </a:spcAft>
+              <a:defRPr sz="1500">
+                <a:solidFill>
+                  <a:srgbClr val="FF6B35"/>
+                </a:solidFill>
+                <a:latin typeface="Microsoft YaHei"/>
+              </a:defRPr>
+            </a:pPr>
+          </a:p>
+          <a:p>
+            <a:pPr>
+              <a:spcAft>
+                <a:spcPts val="600"/>
+              </a:spcAft>
+              <a:defRPr sz="1500">
+                <a:solidFill>
+                  <a:srgbClr val="FF6B35"/>
+                </a:solidFill>
+                <a:latin typeface="Microsoft YaHei"/>
+              </a:defRPr>
+            </a:pPr>
+            <a:r>
+              <a:t>Loss: L_CE + 0.15 * L_contrastive</a:t>
+            </a:r>
+          </a:p>
+          <a:p>
+            <a:pPr>
+              <a:spcAft>
+                <a:spcPts val="600"/>
+              </a:spcAft>
+              <a:defRPr sz="1500">
+                <a:solidFill>
+                  <a:srgbClr val="FF6B35"/>
+                </a:solidFill>
+                <a:latin typeface="Microsoft YaHei"/>
+              </a:defRPr>
+            </a:pPr>
+          </a:p>
+          <a:p>
+            <a:pPr>
+              <a:spcAft>
+                <a:spcPts val="600"/>
+              </a:spcAft>
+              <a:defRPr sz="1500">
+                <a:solidFill>
+                  <a:srgbClr val="FF6B35"/>
+                </a:solidFill>
+                <a:latin typeface="Microsoft YaHei"/>
+              </a:defRPr>
+            </a:pPr>
+            <a:r>
+              <a:t>训练数据: ~9,000 条 (1,000/语言)</a:t>
+            </a:r>
+          </a:p>
+          <a:p>
+            <a:pPr>
+              <a:spcAft>
+                <a:spcPts val="600"/>
+              </a:spcAft>
+              <a:defRPr sz="1500">
+                <a:solidFill>
+                  <a:srgbClr val="FF6B35"/>
+                </a:solidFill>
+                <a:latin typeface="Microsoft YaHei"/>
+              </a:defRPr>
+            </a:pPr>
+            <a:r>
+              <a:t>GPU: A40, ~4.5h</a:t>
             </a:r>
           </a:p>
         </p:txBody>
@@ -5713,7 +5098,7 @@
               </a:defRPr>
             </a:pPr>
             <a:r>
-              <a:t>去毒模型设计</a:t>
+              <a:t>有监督对比学习</a:t>
             </a:r>
           </a:p>
         </p:txBody>
@@ -5784,7 +5169,7 @@
               </a:defRPr>
             </a:pPr>
             <a:r>
-              <a:t>Detox Model: mt0-large + LoRA</a:t>
+              <a:t>Supervised Contrastive Learning</a:t>
             </a:r>
           </a:p>
         </p:txBody>
@@ -5798,7 +5183,7 @@
         <p:spPr>
           <a:xfrm>
             <a:off x="731520" y="2011680"/>
-            <a:ext cx="5029200" cy="365760"/>
+            <a:ext cx="5029200" cy="3657600"/>
           </a:xfrm>
           <a:prstGeom prst="rect">
             <a:avLst/>
@@ -5811,16 +5196,35 @@
           </a:bodyPr>
           <a:lstStyle/>
           <a:p>
-            <a:pPr algn="l">
-              <a:defRPr sz="1800" b="1">
-                <a:solidFill>
-                  <a:srgbClr val="0078D4"/>
-                </a:solidFill>
-                <a:latin typeface="Microsoft YaHei"/>
-              </a:defRPr>
-            </a:pPr>
-            <a:r>
-              <a:t>模型架构</a:t>
+            <a:pPr>
+              <a:spcAft>
+                <a:spcPts val="600"/>
+              </a:spcAft>
+              <a:defRPr sz="1500">
+                <a:solidFill>
+                  <a:srgbClr val="FF6B35"/>
+                </a:solidFill>
+                <a:latin typeface="Microsoft YaHei"/>
+              </a:defRPr>
+            </a:pPr>
+            <a:r>
+              <a:t>问题: 模型退化为简单复制</a:t>
+            </a:r>
+          </a:p>
+          <a:p>
+            <a:pPr>
+              <a:spcAft>
+                <a:spcPts val="600"/>
+              </a:spcAft>
+              <a:defRPr sz="1500">
+                <a:solidFill>
+                  <a:srgbClr val="FF6B35"/>
+                </a:solidFill>
+                <a:latin typeface="Microsoft YaHei"/>
+              </a:defRPr>
+            </a:pPr>
+            <a:r>
+              <a:t>SimCSE 只增强鲁棒性，不帮助去毒</a:t>
             </a:r>
           </a:p>
         </p:txBody>
@@ -5833,8 +5237,8 @@
         </p:nvSpPr>
         <p:spPr>
           <a:xfrm>
-            <a:off x="731520" y="2560320"/>
-            <a:ext cx="5029200" cy="3200400"/>
+            <a:off x="6400800" y="2011680"/>
+            <a:ext cx="5029200" cy="4114800"/>
           </a:xfrm>
           <a:prstGeom prst="rect">
             <a:avLst/>
@@ -5849,288 +5253,110 @@
           <a:p>
             <a:pPr>
               <a:spcAft>
-                <a:spcPts val="800"/>
-              </a:spcAft>
-              <a:defRPr sz="1400">
-                <a:solidFill>
-                  <a:srgbClr val="FFFFFF"/>
-                </a:solidFill>
-                <a:latin typeface="Microsoft YaHei"/>
-              </a:defRPr>
-            </a:pPr>
-            <a:r>
-              <a:t>基座: bigscience/mt0-large (1.2B)</a:t>
-            </a:r>
-          </a:p>
-          <a:p>
-            <a:pPr>
-              <a:spcAft>
-                <a:spcPts val="800"/>
-              </a:spcAft>
-              <a:defRPr sz="1400">
-                <a:solidFill>
-                  <a:srgbClr val="FFFFFF"/>
-                </a:solidFill>
-                <a:latin typeface="Microsoft YaHei"/>
-              </a:defRPr>
-            </a:pPr>
-            <a:r>
-              <a:t>Encoder-Decoder Transformer</a:t>
-            </a:r>
-          </a:p>
-          <a:p>
-            <a:pPr>
-              <a:spcAft>
-                <a:spcPts val="800"/>
-              </a:spcAft>
-              <a:defRPr sz="1400">
-                <a:solidFill>
-                  <a:srgbClr val="FFFFFF"/>
-                </a:solidFill>
-                <a:latin typeface="Microsoft YaHei"/>
-              </a:defRPr>
-            </a:pPr>
-            <a:r>
-              <a:t>12 层编码器 + 12 层解码器</a:t>
-            </a:r>
-          </a:p>
-          <a:p>
-            <a:pPr>
-              <a:spcAft>
-                <a:spcPts val="800"/>
-              </a:spcAft>
-              <a:defRPr sz="1400">
-                <a:solidFill>
-                  <a:srgbClr val="FFFFFF"/>
-                </a:solidFill>
-                <a:latin typeface="Microsoft YaHei"/>
-              </a:defRPr>
-            </a:pPr>
-            <a:r>
-              <a:t>d_model=1024, 16 heads, d_ff=2816</a:t>
-            </a:r>
-          </a:p>
-          <a:p>
-            <a:pPr>
-              <a:spcAft>
-                <a:spcPts val="800"/>
-              </a:spcAft>
-              <a:defRPr sz="1400">
-                <a:solidFill>
-                  <a:srgbClr val="FFFFFF"/>
-                </a:solidFill>
-                <a:latin typeface="Microsoft YaHei"/>
-              </a:defRPr>
-            </a:pPr>
-            <a:r>
-              <a:t>输入格式: "detoxify: {有毒文本}"</a:t>
-            </a:r>
-          </a:p>
-          <a:p>
-            <a:pPr>
-              <a:spcAft>
-                <a:spcPts val="800"/>
-              </a:spcAft>
-              <a:defRPr sz="1400">
-                <a:solidFill>
-                  <a:srgbClr val="FFFFFF"/>
-                </a:solidFill>
-                <a:latin typeface="Microsoft YaHei"/>
-              </a:defRPr>
-            </a:pPr>
-            <a:r>
-              <a:t>输出: 对应的中性文本</a:t>
-            </a:r>
-          </a:p>
-        </p:txBody>
-      </p:sp>
-      <p:sp>
-        <p:nvSpPr>
-          <p:cNvPr id="7" name="TextBox 6"/>
-          <p:cNvSpPr txBox="1"/>
-          <p:nvPr/>
-        </p:nvSpPr>
-        <p:spPr>
-          <a:xfrm>
-            <a:off x="6400800" y="2011680"/>
-            <a:ext cx="5029200" cy="365760"/>
-          </a:xfrm>
-          <a:prstGeom prst="rect">
-            <a:avLst/>
-          </a:prstGeom>
-          <a:noFill/>
-        </p:spPr>
-        <p:txBody>
-          <a:bodyPr wrap="square">
-            <a:spAutoFit/>
-          </a:bodyPr>
-          <a:lstStyle/>
-          <a:p>
-            <a:pPr algn="l">
-              <a:defRPr sz="1800" b="1">
-                <a:solidFill>
-                  <a:srgbClr val="FF6B35"/>
-                </a:solidFill>
-                <a:latin typeface="Microsoft YaHei"/>
-              </a:defRPr>
-            </a:pPr>
-            <a:r>
-              <a:t>LoRA 配置</a:t>
-            </a:r>
-          </a:p>
-        </p:txBody>
-      </p:sp>
-      <p:sp>
-        <p:nvSpPr>
-          <p:cNvPr id="8" name="TextBox 7"/>
-          <p:cNvSpPr txBox="1"/>
-          <p:nvPr/>
-        </p:nvSpPr>
-        <p:spPr>
-          <a:xfrm>
-            <a:off x="6400800" y="2560320"/>
-            <a:ext cx="5029200" cy="3200400"/>
-          </a:xfrm>
-          <a:prstGeom prst="rect">
-            <a:avLst/>
-          </a:prstGeom>
-          <a:noFill/>
-        </p:spPr>
-        <p:txBody>
-          <a:bodyPr wrap="square">
-            <a:spAutoFit/>
-          </a:bodyPr>
-          <a:lstStyle/>
-          <a:p>
-            <a:pPr>
-              <a:spcAft>
-                <a:spcPts val="800"/>
-              </a:spcAft>
-              <a:defRPr sz="1400">
-                <a:solidFill>
-                  <a:srgbClr val="FFFFFF"/>
-                </a:solidFill>
-                <a:latin typeface="Microsoft YaHei"/>
-              </a:defRPr>
-            </a:pPr>
-            <a:r>
-              <a:t>秩 r = 32, 缩放 alpha = 64</a:t>
-            </a:r>
-          </a:p>
-          <a:p>
-            <a:pPr>
-              <a:spcAft>
-                <a:spcPts val="800"/>
-              </a:spcAft>
-              <a:defRPr sz="1400">
-                <a:solidFill>
-                  <a:srgbClr val="FFFFFF"/>
-                </a:solidFill>
-                <a:latin typeface="Microsoft YaHei"/>
-              </a:defRPr>
-            </a:pPr>
-            <a:r>
-              <a:t>Dropout = 0.1</a:t>
-            </a:r>
-          </a:p>
-          <a:p>
-            <a:pPr>
-              <a:spcAft>
-                <a:spcPts val="800"/>
-              </a:spcAft>
-              <a:defRPr sz="1400">
-                <a:solidFill>
-                  <a:srgbClr val="FFFFFF"/>
-                </a:solidFill>
-                <a:latin typeface="Microsoft YaHei"/>
-              </a:defRPr>
-            </a:pPr>
-            <a:r>
-              <a:t>目标模块: [q, k, v, o]</a:t>
-            </a:r>
-          </a:p>
-          <a:p>
-            <a:pPr>
-              <a:spcAft>
-                <a:spcPts val="800"/>
-              </a:spcAft>
-              <a:defRPr sz="1400">
-                <a:solidFill>
-                  <a:srgbClr val="FFFFFF"/>
-                </a:solidFill>
-                <a:latin typeface="Microsoft YaHei"/>
-              </a:defRPr>
-            </a:pPr>
-            <a:r>
-              <a:t>可训练参数: 18.9M / 1.25B = 1.51%</a:t>
-            </a:r>
-          </a:p>
-          <a:p>
-            <a:pPr>
-              <a:spcAft>
-                <a:spcPts val="800"/>
-              </a:spcAft>
-              <a:defRPr sz="1400">
-                <a:solidFill>
-                  <a:srgbClr val="FFFFFF"/>
-                </a:solidFill>
-                <a:latin typeface="Microsoft YaHei"/>
-              </a:defRPr>
-            </a:pPr>
-            <a:r>
-              <a:t>显存需求: ~12GB (A40 48GB)</a:t>
-            </a:r>
-          </a:p>
-          <a:p>
-            <a:pPr>
-              <a:spcAft>
-                <a:spcPts val="800"/>
-              </a:spcAft>
-              <a:defRPr sz="1400">
-                <a:solidFill>
-                  <a:srgbClr val="FFFFFF"/>
-                </a:solidFill>
-                <a:latin typeface="Microsoft YaHei"/>
-              </a:defRPr>
-            </a:pPr>
-            <a:r>
-              <a:t>训练速度: 约 1 it/s</a:t>
-            </a:r>
-          </a:p>
-        </p:txBody>
-      </p:sp>
-      <p:sp>
-        <p:nvSpPr>
-          <p:cNvPr id="9" name="TextBox 8"/>
-          <p:cNvSpPr txBox="1"/>
-          <p:nvPr/>
-        </p:nvSpPr>
-        <p:spPr>
-          <a:xfrm>
-            <a:off x="731520" y="5943600"/>
-            <a:ext cx="10515600" cy="457200"/>
-          </a:xfrm>
-          <a:prstGeom prst="rect">
-            <a:avLst/>
-          </a:prstGeom>
-          <a:noFill/>
-        </p:spPr>
-        <p:txBody>
-          <a:bodyPr wrap="square">
-            <a:spAutoFit/>
-          </a:bodyPr>
-          <a:lstStyle/>
-          <a:p>
-            <a:pPr algn="ctr">
-              <a:defRPr sz="1600" b="0">
-                <a:solidFill>
-                  <a:srgbClr val="E8E8E8"/>
-                </a:solidFill>
-                <a:latin typeface="Microsoft YaHei"/>
-              </a:defRPr>
-            </a:pPr>
-            <a:r>
-              <a:t>Loss = L_CE + lambda * L_contrastive   |   lambda = 0.15, tau = 0.05</a:t>
+                <a:spcPts val="600"/>
+              </a:spcAft>
+              <a:defRPr sz="1500">
+                <a:solidFill>
+                  <a:srgbClr val="00A878"/>
+                </a:solidFill>
+                <a:latin typeface="Microsoft YaHei"/>
+              </a:defRPr>
+            </a:pPr>
+            <a:r>
+              <a:t>toxic x -&gt; encoder -&gt; h_toxic</a:t>
+            </a:r>
+          </a:p>
+          <a:p>
+            <a:pPr>
+              <a:spcAft>
+                <a:spcPts val="600"/>
+              </a:spcAft>
+              <a:defRPr sz="1500">
+                <a:solidFill>
+                  <a:srgbClr val="00A878"/>
+                </a:solidFill>
+                <a:latin typeface="Microsoft YaHei"/>
+              </a:defRPr>
+            </a:pPr>
+            <a:r>
+              <a:t>neutral y -&gt; encoder -&gt; h_neutral</a:t>
+            </a:r>
+          </a:p>
+          <a:p>
+            <a:pPr>
+              <a:spcAft>
+                <a:spcPts val="600"/>
+              </a:spcAft>
+              <a:defRPr sz="1500">
+                <a:solidFill>
+                  <a:srgbClr val="00A878"/>
+                </a:solidFill>
+                <a:latin typeface="Microsoft YaHei"/>
+              </a:defRPr>
+            </a:pPr>
+            <a:r>
+              <a:t>MLP -&gt; z_toxic, z_neutral</a:t>
+            </a:r>
+          </a:p>
+          <a:p>
+            <a:pPr>
+              <a:spcAft>
+                <a:spcPts val="600"/>
+              </a:spcAft>
+              <a:defRPr sz="1500">
+                <a:solidFill>
+                  <a:srgbClr val="00A878"/>
+                </a:solidFill>
+                <a:latin typeface="Microsoft YaHei"/>
+              </a:defRPr>
+            </a:pPr>
+            <a:r>
+              <a:t>NT-Xent 正对拉近/负对推远</a:t>
+            </a:r>
+          </a:p>
+          <a:p>
+            <a:pPr>
+              <a:spcAft>
+                <a:spcPts val="600"/>
+              </a:spcAft>
+              <a:defRPr sz="1500">
+                <a:solidFill>
+                  <a:srgbClr val="00A878"/>
+                </a:solidFill>
+                <a:latin typeface="Microsoft YaHei"/>
+              </a:defRPr>
+            </a:pPr>
+          </a:p>
+          <a:p>
+            <a:pPr>
+              <a:spcAft>
+                <a:spcPts val="600"/>
+              </a:spcAft>
+              <a:defRPr sz="1500">
+                <a:solidFill>
+                  <a:srgbClr val="00A878"/>
+                </a:solidFill>
+                <a:latin typeface="Microsoft YaHei"/>
+              </a:defRPr>
+            </a:pPr>
+            <a:r>
+              <a:t>batch 内多语言混合 -&gt; 隐式跨语言对比</a:t>
+            </a:r>
+          </a:p>
+          <a:p>
+            <a:pPr>
+              <a:spcAft>
+                <a:spcPts val="600"/>
+              </a:spcAft>
+              <a:defRPr sz="1500">
+                <a:solidFill>
+                  <a:srgbClr val="00A878"/>
+                </a:solidFill>
+                <a:latin typeface="Microsoft YaHei"/>
+              </a:defRPr>
+            </a:pPr>
+            <a:r>
+              <a:t>帮助零资源语言直接去毒</a:t>
             </a:r>
           </a:p>
         </p:txBody>
@@ -6192,7 +5418,7 @@
               </a:defRPr>
             </a:pPr>
             <a:r>
-              <a:t>有监督对比学习</a:t>
+              <a:t>训练过程</a:t>
             </a:r>
           </a:p>
         </p:txBody>
@@ -6263,7 +5489,7 @@
               </a:defRPr>
             </a:pPr>
             <a:r>
-              <a:t>Supervised Contrastive Learning</a:t>
+              <a:t>Training Log</a:t>
             </a:r>
           </a:p>
         </p:txBody>
@@ -6276,8 +5502,8 @@
         </p:nvSpPr>
         <p:spPr>
           <a:xfrm>
-            <a:off x="731520" y="1828800"/>
-            <a:ext cx="5029200" cy="365760"/>
+            <a:off x="731520" y="2011680"/>
+            <a:ext cx="5029200" cy="3200400"/>
           </a:xfrm>
           <a:prstGeom prst="rect">
             <a:avLst/>
@@ -6290,16 +5516,51 @@
           </a:bodyPr>
           <a:lstStyle/>
           <a:p>
-            <a:pPr algn="l">
-              <a:defRPr sz="1800" b="1">
-                <a:solidFill>
-                  <a:srgbClr val="FF6B35"/>
-                </a:solidFill>
-                <a:latin typeface="Microsoft YaHei"/>
-              </a:defRPr>
-            </a:pPr>
-            <a:r>
-              <a:t>问题</a:t>
+            <a:pPr>
+              <a:spcAft>
+                <a:spcPts val="600"/>
+              </a:spcAft>
+              <a:defRPr sz="1500">
+                <a:solidFill>
+                  <a:srgbClr val="FFFFFF"/>
+                </a:solidFill>
+                <a:latin typeface="Microsoft YaHei"/>
+              </a:defRPr>
+            </a:pPr>
+            <a:r>
+              <a:t>Batch: 8x4=32, lr=3e-4</a:t>
+            </a:r>
+          </a:p>
+          <a:p>
+            <a:pPr>
+              <a:spcAft>
+                <a:spcPts val="600"/>
+              </a:spcAft>
+              <a:defRPr sz="1500">
+                <a:solidFill>
+                  <a:srgbClr val="FFFFFF"/>
+                </a:solidFill>
+                <a:latin typeface="Microsoft YaHei"/>
+              </a:defRPr>
+            </a:pPr>
+            <a:r>
+              <a:t>AdamW, wd=0.01</a:t>
+            </a:r>
+          </a:p>
+          <a:p>
+            <a:pPr>
+              <a:spcAft>
+                <a:spcPts val="600"/>
+              </a:spcAft>
+              <a:defRPr sz="1500">
+                <a:solidFill>
+                  <a:srgbClr val="FFFFFF"/>
+                </a:solidFill>
+                <a:latin typeface="Microsoft YaHei"/>
+              </a:defRPr>
+            </a:pPr>
+            <a:r>
+              <a:t>Epochs: 15 (Early Stop p=5)</a:t>
             </a:r>
           </a:p>
         </p:txBody>
@@ -6312,8 +5573,8 @@
         </p:nvSpPr>
         <p:spPr>
           <a:xfrm>
-            <a:off x="731520" y="2286000"/>
-            <a:ext cx="5029200" cy="1828800"/>
+            <a:off x="6400800" y="2011680"/>
+            <a:ext cx="5029200" cy="4114800"/>
           </a:xfrm>
           <a:prstGeom prst="rect">
             <a:avLst/>
@@ -6328,77 +5589,9 @@
           <a:p>
             <a:pPr>
               <a:spcAft>
-                <a:spcPts val="800"/>
-              </a:spcAft>
-              <a:defRPr sz="1400">
-                <a:solidFill>
-                  <a:srgbClr val="FFFFFF"/>
-                </a:solidFill>
-                <a:latin typeface="Microsoft YaHei"/>
-              </a:defRPr>
-            </a:pPr>
-            <a:r>
-              <a:t>模型容易退化为简单复制</a:t>
-            </a:r>
-          </a:p>
-          <a:p>
-            <a:pPr>
-              <a:spcAft>
-                <a:spcPts val="800"/>
-              </a:spcAft>
-              <a:defRPr sz="1400">
-                <a:solidFill>
-                  <a:srgbClr val="FFFFFF"/>
-                </a:solidFill>
-                <a:latin typeface="Microsoft YaHei"/>
-              </a:defRPr>
-            </a:pPr>
-            <a:r>
-              <a:t>仅删除明显有害词，不做语义改写</a:t>
-            </a:r>
-          </a:p>
-          <a:p>
-            <a:pPr>
-              <a:spcAft>
-                <a:spcPts val="800"/>
-              </a:spcAft>
-              <a:defRPr sz="1400">
-                <a:solidFill>
-                  <a:srgbClr val="FFFFFF"/>
-                </a:solidFill>
-                <a:latin typeface="Microsoft YaHei"/>
-              </a:defRPr>
-            </a:pPr>
-            <a:r>
-              <a:t>原始 SimCSE: 同一输入 x2 dropout  -&gt; 仅增强鲁棒性，对去毒无帮助</a:t>
-            </a:r>
-          </a:p>
-        </p:txBody>
-      </p:sp>
-      <p:sp>
-        <p:nvSpPr>
-          <p:cNvPr id="7" name="TextBox 6"/>
-          <p:cNvSpPr txBox="1"/>
-          <p:nvPr/>
-        </p:nvSpPr>
-        <p:spPr>
-          <a:xfrm>
-            <a:off x="731520" y="4114800"/>
-            <a:ext cx="5029200" cy="365760"/>
-          </a:xfrm>
-          <a:prstGeom prst="rect">
-            <a:avLst/>
-          </a:prstGeom>
-          <a:noFill/>
-        </p:spPr>
-        <p:txBody>
-          <a:bodyPr wrap="square">
-            <a:spAutoFit/>
-          </a:bodyPr>
-          <a:lstStyle/>
-          <a:p>
-            <a:pPr algn="l">
-              <a:defRPr sz="1800" b="1">
+                <a:spcPts val="600"/>
+              </a:spcAft>
+              <a:defRPr sz="1500">
                 <a:solidFill>
                   <a:srgbClr val="00A878"/>
                 </a:solidFill>
@@ -6406,265 +5599,87 @@
               </a:defRPr>
             </a:pPr>
             <a:r>
-              <a:t>我们的方案</a:t>
-            </a:r>
-          </a:p>
-        </p:txBody>
-      </p:sp>
-      <p:sp>
-        <p:nvSpPr>
-          <p:cNvPr id="8" name="TextBox 7"/>
-          <p:cNvSpPr txBox="1"/>
-          <p:nvPr/>
-        </p:nvSpPr>
-        <p:spPr>
-          <a:xfrm>
-            <a:off x="731520" y="4572000"/>
-            <a:ext cx="5029200" cy="1828800"/>
-          </a:xfrm>
-          <a:prstGeom prst="rect">
-            <a:avLst/>
-          </a:prstGeom>
-          <a:noFill/>
-        </p:spPr>
-        <p:txBody>
-          <a:bodyPr wrap="square">
-            <a:spAutoFit/>
-          </a:bodyPr>
-          <a:lstStyle/>
-          <a:p>
-            <a:pPr>
-              <a:spcAft>
-                <a:spcPts val="800"/>
-              </a:spcAft>
-              <a:defRPr sz="1400">
-                <a:solidFill>
-                  <a:srgbClr val="FFFFFF"/>
-                </a:solidFill>
-                <a:latin typeface="Microsoft YaHei"/>
-              </a:defRPr>
-            </a:pPr>
-            <a:r>
-              <a:t>有监督对比: toxic 编码 &lt;--&gt; neutral 编码</a:t>
-            </a:r>
-          </a:p>
-          <a:p>
-            <a:pPr>
-              <a:spcAft>
-                <a:spcPts val="800"/>
-              </a:spcAft>
-              <a:defRPr sz="1400">
-                <a:solidFill>
-                  <a:srgbClr val="FFFFFF"/>
-                </a:solidFill>
-                <a:latin typeface="Microsoft YaHei"/>
-              </a:defRPr>
-            </a:pPr>
-            <a:r>
-              <a:t>NT-Xent 损失: 正对拉近, 负对推远</a:t>
-            </a:r>
-          </a:p>
-          <a:p>
-            <a:pPr>
-              <a:spcAft>
-                <a:spcPts val="800"/>
-              </a:spcAft>
-              <a:defRPr sz="1400">
-                <a:solidFill>
-                  <a:srgbClr val="FFFFFF"/>
-                </a:solidFill>
-                <a:latin typeface="Microsoft YaHei"/>
-              </a:defRPr>
-            </a:pPr>
-            <a:r>
-              <a:t>直接建模 toxic -&gt; neutral 语义映射</a:t>
-            </a:r>
-          </a:p>
-        </p:txBody>
-      </p:sp>
-      <p:sp>
-        <p:nvSpPr>
-          <p:cNvPr id="9" name="TextBox 8"/>
-          <p:cNvSpPr txBox="1"/>
-          <p:nvPr/>
-        </p:nvSpPr>
-        <p:spPr>
-          <a:xfrm>
-            <a:off x="6400800" y="1828800"/>
-            <a:ext cx="5029200" cy="365760"/>
-          </a:xfrm>
-          <a:prstGeom prst="rect">
-            <a:avLst/>
-          </a:prstGeom>
-          <a:noFill/>
-        </p:spPr>
-        <p:txBody>
-          <a:bodyPr wrap="square">
-            <a:spAutoFit/>
-          </a:bodyPr>
-          <a:lstStyle/>
-          <a:p>
-            <a:pPr algn="l">
-              <a:defRPr sz="1800" b="1">
-                <a:solidFill>
-                  <a:srgbClr val="0078D4"/>
-                </a:solidFill>
-                <a:latin typeface="Microsoft YaHei"/>
-              </a:defRPr>
-            </a:pPr>
-            <a:r>
-              <a:t>实现细节</a:t>
-            </a:r>
-          </a:p>
-        </p:txBody>
-      </p:sp>
-      <p:sp>
-        <p:nvSpPr>
-          <p:cNvPr id="10" name="TextBox 9"/>
-          <p:cNvSpPr txBox="1"/>
-          <p:nvPr/>
-        </p:nvSpPr>
-        <p:spPr>
-          <a:xfrm>
-            <a:off x="6400800" y="2286000"/>
-            <a:ext cx="5029200" cy="4114800"/>
-          </a:xfrm>
-          <a:prstGeom prst="rect">
-            <a:avLst/>
-          </a:prstGeom>
-          <a:noFill/>
-        </p:spPr>
-        <p:txBody>
-          <a:bodyPr wrap="square">
-            <a:spAutoFit/>
-          </a:bodyPr>
-          <a:lstStyle/>
-          <a:p>
-            <a:pPr>
-              <a:spcAft>
-                <a:spcPts val="800"/>
-              </a:spcAft>
-              <a:defRPr sz="1300">
-                <a:solidFill>
-                  <a:srgbClr val="FFFFFF"/>
-                </a:solidFill>
-                <a:latin typeface="Microsoft YaHei"/>
-              </a:defRPr>
-            </a:pPr>
-            <a:r>
-              <a:t>1. 编码 toxic text x -&gt; h_toxic</a:t>
-            </a:r>
-          </a:p>
-          <a:p>
-            <a:pPr>
-              <a:spcAft>
-                <a:spcPts val="800"/>
-              </a:spcAft>
-              <a:defRPr sz="1300">
-                <a:solidFill>
-                  <a:srgbClr val="FFFFFF"/>
-                </a:solidFill>
-                <a:latin typeface="Microsoft YaHei"/>
-              </a:defRPr>
-            </a:pPr>
-            <a:r>
-              <a:t>2. 编码 neutral text y -&gt; h_neutral</a:t>
-            </a:r>
-          </a:p>
-          <a:p>
-            <a:pPr>
-              <a:spcAft>
-                <a:spcPts val="800"/>
-              </a:spcAft>
-              <a:defRPr sz="1300">
-                <a:solidFill>
-                  <a:srgbClr val="FFFFFF"/>
-                </a:solidFill>
-                <a:latin typeface="Microsoft YaHei"/>
-              </a:defRPr>
-            </a:pPr>
-            <a:r>
-              <a:t>3. Projection Head (MLP): 1024 -&gt; 1024 -&gt; 256</a:t>
-            </a:r>
-          </a:p>
-          <a:p>
-            <a:pPr>
-              <a:spcAft>
-                <a:spcPts val="800"/>
-              </a:spcAft>
-              <a:defRPr sz="1300">
-                <a:solidFill>
-                  <a:srgbClr val="FFFFFF"/>
-                </a:solidFill>
-                <a:latin typeface="Microsoft YaHei"/>
-              </a:defRPr>
-            </a:pPr>
-            <a:r>
-              <a:t>4. z_toxic, z_neutral (L2 normalized)</a:t>
-            </a:r>
-          </a:p>
-          <a:p>
-            <a:pPr>
-              <a:spcAft>
-                <a:spcPts val="800"/>
-              </a:spcAft>
-              <a:defRPr sz="1300">
-                <a:solidFill>
-                  <a:srgbClr val="FFFFFF"/>
-                </a:solidFill>
-                <a:latin typeface="Microsoft YaHei"/>
-              </a:defRPr>
-            </a:pPr>
-            <a:r>
-              <a:t>5. L_contrastive = NT-Xent(z_toxic, z_neutral)</a:t>
-            </a:r>
-          </a:p>
-          <a:p>
-            <a:pPr>
-              <a:spcAft>
-                <a:spcPts val="800"/>
-              </a:spcAft>
-              <a:defRPr sz="1300">
-                <a:solidFill>
-                  <a:srgbClr val="FFFFFF"/>
-                </a:solidFill>
-                <a:latin typeface="Microsoft YaHei"/>
-              </a:defRPr>
-            </a:pPr>
-            <a:r>
-              <a:t>   Sim[i,j] = z_i dot z_j / tau</a:t>
-            </a:r>
-          </a:p>
-          <a:p>
-            <a:pPr>
-              <a:spcAft>
-                <a:spcPts val="800"/>
-              </a:spcAft>
-              <a:defRPr sz="1300">
-                <a:solidFill>
-                  <a:srgbClr val="FFFFFF"/>
-                </a:solidFill>
-                <a:latin typeface="Microsoft YaHei"/>
-              </a:defRPr>
-            </a:pPr>
-            <a:r>
-              <a:t>   Positive pair: (toxic_i, neutral_i)</a:t>
-            </a:r>
-          </a:p>
-          <a:p>
-            <a:pPr>
-              <a:spcAft>
-                <a:spcPts val="800"/>
-              </a:spcAft>
-              <a:defRPr sz="1300">
-                <a:solidFill>
-                  <a:srgbClr val="FFFFFF"/>
-                </a:solidFill>
-                <a:latin typeface="Microsoft YaHei"/>
-              </a:defRPr>
-            </a:pPr>
-            <a:r>
-              <a:t>   Negatives: all other 2B-2 pairs in batch</a:t>
+              <a:t>Loss 变化:</a:t>
+            </a:r>
+          </a:p>
+          <a:p>
+            <a:pPr>
+              <a:spcAft>
+                <a:spcPts val="600"/>
+              </a:spcAft>
+              <a:defRPr sz="1500">
+                <a:solidFill>
+                  <a:srgbClr val="00A878"/>
+                </a:solidFill>
+                <a:latin typeface="Microsoft YaHei"/>
+              </a:defRPr>
+            </a:pPr>
+            <a:r>
+              <a:t>  ep 1:  2.09</a:t>
+            </a:r>
+          </a:p>
+          <a:p>
+            <a:pPr>
+              <a:spcAft>
+                <a:spcPts val="600"/>
+              </a:spcAft>
+              <a:defRPr sz="1500">
+                <a:solidFill>
+                  <a:srgbClr val="00A878"/>
+                </a:solidFill>
+                <a:latin typeface="Microsoft YaHei"/>
+              </a:defRPr>
+            </a:pPr>
+            <a:r>
+              <a:t>  ep 5:  1.29</a:t>
+            </a:r>
+          </a:p>
+          <a:p>
+            <a:pPr>
+              <a:spcAft>
+                <a:spcPts val="600"/>
+              </a:spcAft>
+              <a:defRPr sz="1500">
+                <a:solidFill>
+                  <a:srgbClr val="00A878"/>
+                </a:solidFill>
+                <a:latin typeface="Microsoft YaHei"/>
+              </a:defRPr>
+            </a:pPr>
+            <a:r>
+              <a:t>  ep 7:  1.05 (eval 0.99)</a:t>
+            </a:r>
+          </a:p>
+          <a:p>
+            <a:pPr>
+              <a:spcAft>
+                <a:spcPts val="600"/>
+              </a:spcAft>
+              <a:defRPr sz="1500">
+                <a:solidFill>
+                  <a:srgbClr val="00A878"/>
+                </a:solidFill>
+                <a:latin typeface="Microsoft YaHei"/>
+              </a:defRPr>
+            </a:pPr>
+            <a:r>
+              <a:t>  ep 11: 0.89</a:t>
+            </a:r>
+          </a:p>
+          <a:p>
+            <a:pPr>
+              <a:spcAft>
+                <a:spcPts val="600"/>
+              </a:spcAft>
+              <a:defRPr sz="1500">
+                <a:solidFill>
+                  <a:srgbClr val="00A878"/>
+                </a:solidFill>
+                <a:latin typeface="Microsoft YaHei"/>
+              </a:defRPr>
+            </a:pPr>
+            <a:r>
+              <a:t>  ep 15: 0.85 (eval 0.86)</a:t>
             </a:r>
           </a:p>
         </p:txBody>
@@ -6726,7 +5741,7 @@
               </a:defRPr>
             </a:pPr>
             <a:r>
-              <a:t>训练配置</a:t>
+              <a:t>实验结果</a:t>
             </a:r>
           </a:p>
         </p:txBody>
@@ -6797,7 +5812,7 @@
               </a:defRPr>
             </a:pPr>
             <a:r>
-              <a:t>Training Configuration</a:t>
+              <a:t>Results</a:t>
             </a:r>
           </a:p>
         </p:txBody>
@@ -6810,8 +5825,8 @@
         </p:nvSpPr>
         <p:spPr>
           <a:xfrm>
-            <a:off x="731520" y="1828800"/>
-            <a:ext cx="5029200" cy="365760"/>
+            <a:off x="731520" y="2011680"/>
+            <a:ext cx="10515600" cy="4572000"/>
           </a:xfrm>
           <a:prstGeom prst="rect">
             <a:avLst/>
@@ -6824,47 +5839,11 @@
           </a:bodyPr>
           <a:lstStyle/>
           <a:p>
-            <a:pPr algn="l">
-              <a:defRPr sz="1800" b="1">
-                <a:solidFill>
-                  <a:srgbClr val="0078D4"/>
-                </a:solidFill>
-                <a:latin typeface="Microsoft YaHei"/>
-              </a:defRPr>
-            </a:pPr>
-            <a:r>
-              <a:t>数据</a:t>
-            </a:r>
-          </a:p>
-        </p:txBody>
-      </p:sp>
-      <p:sp>
-        <p:nvSpPr>
-          <p:cNvPr id="6" name="TextBox 5"/>
-          <p:cNvSpPr txBox="1"/>
-          <p:nvPr/>
-        </p:nvSpPr>
-        <p:spPr>
-          <a:xfrm>
-            <a:off x="731520" y="2286000"/>
-            <a:ext cx="5029200" cy="2286000"/>
-          </a:xfrm>
-          <a:prstGeom prst="rect">
-            <a:avLst/>
-          </a:prstGeom>
-          <a:noFill/>
-        </p:spPr>
-        <p:txBody>
-          <a:bodyPr wrap="square">
-            <a:spAutoFit/>
-          </a:bodyPr>
-          <a:lstStyle/>
-          <a:p>
-            <a:pPr>
-              <a:spcAft>
-                <a:spcPts val="800"/>
-              </a:spcAft>
-              <a:defRPr sz="1400">
+            <a:pPr>
+              <a:spcAft>
+                <a:spcPts val="600"/>
+              </a:spcAft>
+              <a:defRPr sz="1600">
                 <a:solidFill>
                   <a:srgbClr val="FFFFFF"/>
                 </a:solidFill>
@@ -6872,31 +5851,28 @@
               </a:defRPr>
             </a:pPr>
             <a:r>
-              <a:t>原始: 9 语言 x 400 对 = 3,600 对</a:t>
-            </a:r>
-          </a:p>
-          <a:p>
-            <a:pPr>
-              <a:spcAft>
-                <a:spcPts val="800"/>
-              </a:spcAft>
-              <a:defRPr sz="1400">
+              <a:t>最终 eval_loss = 0.864，无过拟合</a:t>
+            </a:r>
+          </a:p>
+          <a:p>
+            <a:pPr>
+              <a:spcAft>
+                <a:spcPts val="600"/>
+              </a:spcAft>
+              <a:defRPr sz="1600">
                 <a:solidFill>
                   <a:srgbClr val="FFFFFF"/>
                 </a:solidFill>
                 <a:latin typeface="Microsoft YaHei"/>
               </a:defRPr>
             </a:pPr>
-            <a:r>
-              <a:t>+ 跨语言增强 (NLLB 翻译)</a:t>
-            </a:r>
-          </a:p>
-          <a:p>
-            <a:pPr>
-              <a:spcAft>
-                <a:spcPts val="800"/>
-              </a:spcAft>
-              <a:defRPr sz="1400">
+          </a:p>
+          <a:p>
+            <a:pPr>
+              <a:spcAft>
+                <a:spcPts val="600"/>
+              </a:spcAft>
+              <a:defRPr sz="1600">
                 <a:solidFill>
                   <a:srgbClr val="FFFFFF"/>
                 </a:solidFill>
@@ -6904,15 +5880,15 @@
               </a:defRPr>
             </a:pPr>
             <a:r>
-              <a:t>+ LLM 增强 (DeepSeek API)</a:t>
-            </a:r>
-          </a:p>
-          <a:p>
-            <a:pPr>
-              <a:spcAft>
-                <a:spcPts val="800"/>
-              </a:spcAft>
-              <a:defRPr sz="1400">
+              <a:t>德语: Scheisse -&gt; Quatsch   |  阿拉伯语: 狗屎 -&gt; 那个人</a:t>
+            </a:r>
+          </a:p>
+          <a:p>
+            <a:pPr>
+              <a:spcAft>
+                <a:spcPts val="600"/>
+              </a:spcAft>
+              <a:defRPr sz="1600">
                 <a:solidFill>
                   <a:srgbClr val="FFFFFF"/>
                 </a:solidFill>
@@ -6920,90 +5896,28 @@
               </a:defRPr>
             </a:pPr>
             <a:r>
-              <a:t>最终: ~9,000 训练样本 (1,000/语言)</a:t>
-            </a:r>
-          </a:p>
-          <a:p>
-            <a:pPr>
-              <a:spcAft>
-                <a:spcPts val="800"/>
-              </a:spcAft>
-              <a:defRPr sz="1400">
+              <a:t>印地语: 三连脏话 -&gt; 整句重建  |  中文: 脑残粉 -&gt; 不明智的人</a:t>
+            </a:r>
+          </a:p>
+          <a:p>
+            <a:pPr>
+              <a:spcAft>
+                <a:spcPts val="600"/>
+              </a:spcAft>
+              <a:defRPr sz="1600">
                 <a:solidFill>
                   <a:srgbClr val="FFFFFF"/>
                 </a:solidFill>
                 <a:latin typeface="Microsoft YaHei"/>
               </a:defRPr>
             </a:pPr>
-            <a:r>
-              <a:t>80/20 训练/验证分层划分</a:t>
-            </a:r>
-          </a:p>
-        </p:txBody>
-      </p:sp>
-      <p:sp>
-        <p:nvSpPr>
-          <p:cNvPr id="7" name="TextBox 6"/>
-          <p:cNvSpPr txBox="1"/>
-          <p:nvPr/>
-        </p:nvSpPr>
-        <p:spPr>
-          <a:xfrm>
-            <a:off x="731520" y="4754880"/>
-            <a:ext cx="5029200" cy="365760"/>
-          </a:xfrm>
-          <a:prstGeom prst="rect">
-            <a:avLst/>
-          </a:prstGeom>
-          <a:noFill/>
-        </p:spPr>
-        <p:txBody>
-          <a:bodyPr wrap="square">
-            <a:spAutoFit/>
-          </a:bodyPr>
-          <a:lstStyle/>
-          <a:p>
-            <a:pPr algn="l">
-              <a:defRPr sz="1800" b="1">
-                <a:solidFill>
-                  <a:srgbClr val="00A878"/>
-                </a:solidFill>
-                <a:latin typeface="Microsoft YaHei"/>
-              </a:defRPr>
-            </a:pPr>
-            <a:r>
-              <a:t>推理配置</a:t>
-            </a:r>
-          </a:p>
-        </p:txBody>
-      </p:sp>
-      <p:sp>
-        <p:nvSpPr>
-          <p:cNvPr id="8" name="TextBox 7"/>
-          <p:cNvSpPr txBox="1"/>
-          <p:nvPr/>
-        </p:nvSpPr>
-        <p:spPr>
-          <a:xfrm>
-            <a:off x="731520" y="5212080"/>
-            <a:ext cx="5029200" cy="1371600"/>
-          </a:xfrm>
-          <a:prstGeom prst="rect">
-            <a:avLst/>
-          </a:prstGeom>
-          <a:noFill/>
-        </p:spPr>
-        <p:txBody>
-          <a:bodyPr wrap="square">
-            <a:spAutoFit/>
-          </a:bodyPr>
-          <a:lstStyle/>
-          <a:p>
-            <a:pPr>
-              <a:spcAft>
-                <a:spcPts val="800"/>
-              </a:spcAft>
-              <a:defRPr sz="1400">
+          </a:p>
+          <a:p>
+            <a:pPr>
+              <a:spcAft>
+                <a:spcPts val="600"/>
+              </a:spcAft>
+              <a:defRPr sz="1600">
                 <a:solidFill>
                   <a:srgbClr val="FFFFFF"/>
                 </a:solidFill>
@@ -7011,31 +5925,28 @@
               </a:defRPr>
             </a:pPr>
             <a:r>
-              <a:t>Beam Search (beam=5)</a:t>
-            </a:r>
-          </a:p>
-          <a:p>
-            <a:pPr>
-              <a:spcAft>
-                <a:spcPts val="800"/>
-              </a:spcAft>
-              <a:defRPr sz="1400">
+              <a:t>推理效率: 直接去毒 ~2s/条  vs  回译管道 ~38s/条 (快 15 倍)</a:t>
+            </a:r>
+          </a:p>
+          <a:p>
+            <a:pPr>
+              <a:spcAft>
+                <a:spcPts val="600"/>
+              </a:spcAft>
+              <a:defRPr sz="1600">
                 <a:solidFill>
                   <a:srgbClr val="FFFFFF"/>
                 </a:solidFill>
                 <a:latin typeface="Microsoft YaHei"/>
               </a:defRPr>
             </a:pPr>
-            <a:r>
-              <a:t>repetition_penalty=1.5, length_penalty=0.8</a:t>
-            </a:r>
-          </a:p>
-          <a:p>
-            <a:pPr>
-              <a:spcAft>
-                <a:spcPts val="800"/>
-              </a:spcAft>
-              <a:defRPr sz="1400">
+          </a:p>
+          <a:p>
+            <a:pPr>
+              <a:spcAft>
+                <a:spcPts val="600"/>
+              </a:spcAft>
+              <a:defRPr sz="1600">
                 <a:solidFill>
                   <a:srgbClr val="FFFFFF"/>
                 </a:solidFill>
@@ -7043,194 +5954,7 @@
               </a:defRPr>
             </a:pPr>
             <a:r>
-              <a:t>no_repeat_ngram_size=3</a:t>
-            </a:r>
-          </a:p>
-        </p:txBody>
-      </p:sp>
-      <p:sp>
-        <p:nvSpPr>
-          <p:cNvPr id="9" name="TextBox 8"/>
-          <p:cNvSpPr txBox="1"/>
-          <p:nvPr/>
-        </p:nvSpPr>
-        <p:spPr>
-          <a:xfrm>
-            <a:off x="6400800" y="1828800"/>
-            <a:ext cx="5029200" cy="365760"/>
-          </a:xfrm>
-          <a:prstGeom prst="rect">
-            <a:avLst/>
-          </a:prstGeom>
-          <a:noFill/>
-        </p:spPr>
-        <p:txBody>
-          <a:bodyPr wrap="square">
-            <a:spAutoFit/>
-          </a:bodyPr>
-          <a:lstStyle/>
-          <a:p>
-            <a:pPr algn="l">
-              <a:defRPr sz="1800" b="1">
-                <a:solidFill>
-                  <a:srgbClr val="FF6B35"/>
-                </a:solidFill>
-                <a:latin typeface="Microsoft YaHei"/>
-              </a:defRPr>
-            </a:pPr>
-            <a:r>
-              <a:t>超参数</a:t>
-            </a:r>
-          </a:p>
-        </p:txBody>
-      </p:sp>
-      <p:sp>
-        <p:nvSpPr>
-          <p:cNvPr id="10" name="TextBox 9"/>
-          <p:cNvSpPr txBox="1"/>
-          <p:nvPr/>
-        </p:nvSpPr>
-        <p:spPr>
-          <a:xfrm>
-            <a:off x="6400800" y="2286000"/>
-            <a:ext cx="5029200" cy="4114800"/>
-          </a:xfrm>
-          <a:prstGeom prst="rect">
-            <a:avLst/>
-          </a:prstGeom>
-          <a:noFill/>
-        </p:spPr>
-        <p:txBody>
-          <a:bodyPr wrap="square">
-            <a:spAutoFit/>
-          </a:bodyPr>
-          <a:lstStyle/>
-          <a:p>
-            <a:pPr>
-              <a:spcAft>
-                <a:spcPts val="800"/>
-              </a:spcAft>
-              <a:defRPr sz="1300">
-                <a:solidFill>
-                  <a:srgbClr val="FFFFFF"/>
-                </a:solidFill>
-                <a:latin typeface="Microsoft YaHei"/>
-              </a:defRPr>
-            </a:pPr>
-            <a:r>
-              <a:t>GPU: NVIDIA A40 (48GB)</a:t>
-            </a:r>
-          </a:p>
-          <a:p>
-            <a:pPr>
-              <a:spcAft>
-                <a:spcPts val="800"/>
-              </a:spcAft>
-              <a:defRPr sz="1300">
-                <a:solidFill>
-                  <a:srgbClr val="FFFFFF"/>
-                </a:solidFill>
-                <a:latin typeface="Microsoft YaHei"/>
-              </a:defRPr>
-            </a:pPr>
-            <a:r>
-              <a:t>Batch size: 8 x 4 grad accum = 32</a:t>
-            </a:r>
-          </a:p>
-          <a:p>
-            <a:pPr>
-              <a:spcAft>
-                <a:spcPts val="800"/>
-              </a:spcAft>
-              <a:defRPr sz="1300">
-                <a:solidFill>
-                  <a:srgbClr val="FFFFFF"/>
-                </a:solidFill>
-                <a:latin typeface="Microsoft YaHei"/>
-              </a:defRPr>
-            </a:pPr>
-            <a:r>
-              <a:t>Learning rate: 3e-4 (AdamW)</a:t>
-            </a:r>
-          </a:p>
-          <a:p>
-            <a:pPr>
-              <a:spcAft>
-                <a:spcPts val="800"/>
-              </a:spcAft>
-              <a:defRPr sz="1300">
-                <a:solidFill>
-                  <a:srgbClr val="FFFFFF"/>
-                </a:solidFill>
-                <a:latin typeface="Microsoft YaHei"/>
-              </a:defRPr>
-            </a:pPr>
-            <a:r>
-              <a:t>Weight decay: 0.01, warmup: 100 steps</a:t>
-            </a:r>
-          </a:p>
-          <a:p>
-            <a:pPr>
-              <a:spcAft>
-                <a:spcPts val="800"/>
-              </a:spcAft>
-              <a:defRPr sz="1300">
-                <a:solidFill>
-                  <a:srgbClr val="FFFFFF"/>
-                </a:solidFill>
-                <a:latin typeface="Microsoft YaHei"/>
-              </a:defRPr>
-            </a:pPr>
-            <a:r>
-              <a:t>Max epochs: 15, Early Stopping patience=5</a:t>
-            </a:r>
-          </a:p>
-          <a:p>
-            <a:pPr>
-              <a:spcAft>
-                <a:spcPts val="800"/>
-              </a:spcAft>
-              <a:defRPr sz="1300">
-                <a:solidFill>
-                  <a:srgbClr val="FFFFFF"/>
-                </a:solidFill>
-                <a:latin typeface="Microsoft YaHei"/>
-              </a:defRPr>
-            </a:pPr>
-            <a:r>
-              <a:t>Max sequence length: 256 tokens</a:t>
-            </a:r>
-          </a:p>
-          <a:p>
-            <a:pPr>
-              <a:spcAft>
-                <a:spcPts val="800"/>
-              </a:spcAft>
-              <a:defRPr sz="1300">
-                <a:solidFill>
-                  <a:srgbClr val="FFFFFF"/>
-                </a:solidFill>
-                <a:latin typeface="Microsoft YaHei"/>
-              </a:defRPr>
-            </a:pPr>
-            <a:r>
-              <a:t>LoRA: r=32, alpha=64, dropout=0.1</a:t>
-            </a:r>
-          </a:p>
-          <a:p>
-            <a:pPr>
-              <a:spcAft>
-                <a:spcPts val="800"/>
-              </a:spcAft>
-              <a:defRPr sz="1300">
-                <a:solidFill>
-                  <a:srgbClr val="FFFFFF"/>
-                </a:solidFill>
-                <a:latin typeface="Microsoft YaHei"/>
-              </a:defRPr>
-            </a:pPr>
-            <a:r>
-              <a:t>Contrastive: lambda=0.15, tau=0.05, dim=256</a:t>
+              <a:t>复制行为被有效抑制，模型进行真正的语义改写</a:t>
             </a:r>
           </a:p>
         </p:txBody>
@@ -7292,7 +6016,7 @@
               </a:defRPr>
             </a:pPr>
             <a:r>
-              <a:t>实验结果</a:t>
+              <a:t>消融实验</a:t>
             </a:r>
           </a:p>
         </p:txBody>
@@ -7363,7 +6087,7 @@
               </a:defRPr>
             </a:pPr>
             <a:r>
-              <a:t>Experimental Results</a:t>
+              <a:t>Ablation</a:t>
             </a:r>
           </a:p>
         </p:txBody>
@@ -7392,7 +6116,7 @@
           <a:p>
             <a:pPr>
               <a:spcAft>
-                <a:spcPts val="800"/>
+                <a:spcPts val="600"/>
               </a:spcAft>
               <a:defRPr sz="1600">
                 <a:solidFill>
@@ -7402,13 +6126,13 @@
               </a:defRPr>
             </a:pPr>
             <a:r>
-              <a:t>系统在全部 15 种语言上均能有效完成去毒任务</a:t>
-            </a:r>
-          </a:p>
-          <a:p>
-            <a:pPr>
-              <a:spcAft>
-                <a:spcPts val="800"/>
+              <a:t>去除对比学习: -&gt; 模型直接复制，只替换明显有害词</a:t>
+            </a:r>
+          </a:p>
+          <a:p>
+            <a:pPr>
+              <a:spcAft>
+                <a:spcPts val="600"/>
               </a:spcAft>
               <a:defRPr sz="1600">
                 <a:solidFill>
@@ -7421,7 +6145,7 @@
           <a:p>
             <a:pPr>
               <a:spcAft>
-                <a:spcPts val="800"/>
+                <a:spcPts val="600"/>
               </a:spcAft>
               <a:defRPr sz="1600">
                 <a:solidFill>
@@ -7431,13 +6155,13 @@
               </a:defRPr>
             </a:pPr>
             <a:r>
-              <a:t>训练语言的去毒效果显著优于零资源语言，验证了微调的有效性</a:t>
-            </a:r>
-          </a:p>
-          <a:p>
-            <a:pPr>
-              <a:spcAft>
-                <a:spcPts val="800"/>
+              <a:t>去除有害词后处理: -&gt; 残留少量罕用俚语</a:t>
+            </a:r>
+          </a:p>
+          <a:p>
+            <a:pPr>
+              <a:spcAft>
+                <a:spcPts val="600"/>
               </a:spcAft>
               <a:defRPr sz="1600">
                 <a:solidFill>
@@ -7446,14 +6170,11 @@
                 <a:latin typeface="Microsoft YaHei"/>
               </a:defRPr>
             </a:pPr>
-            <a:r>
-              <a:t>  - 英语效果最佳（mt0-large 预训练数据中英语占比最大）</a:t>
-            </a:r>
-          </a:p>
-          <a:p>
-            <a:pPr>
-              <a:spcAft>
-                <a:spcPts val="800"/>
+          </a:p>
+          <a:p>
+            <a:pPr>
+              <a:spcAft>
+                <a:spcPts val="600"/>
               </a:spcAft>
               <a:defRPr sz="1600">
                 <a:solidFill>
@@ -7462,111 +6183,8 @@
                 <a:latin typeface="Microsoft YaHei"/>
               </a:defRPr>
             </a:pPr>
-          </a:p>
-          <a:p>
-            <a:pPr>
-              <a:spcAft>
-                <a:spcPts val="800"/>
-              </a:spcAft>
-              <a:defRPr sz="1600">
-                <a:solidFill>
-                  <a:srgbClr val="FFFFFF"/>
-                </a:solidFill>
-                <a:latin typeface="Microsoft YaHei"/>
-              </a:defRPr>
-            </a:pPr>
-            <a:r>
-              <a:t>中文、日语等与英语差异大的语言在回译管道中可能出现语义漂移</a:t>
-            </a:r>
-          </a:p>
-          <a:p>
-            <a:pPr>
-              <a:spcAft>
-                <a:spcPts val="800"/>
-              </a:spcAft>
-              <a:defRPr sz="1600">
-                <a:solidFill>
-                  <a:srgbClr val="FFFFFF"/>
-                </a:solidFill>
-                <a:latin typeface="Microsoft YaHei"/>
-              </a:defRPr>
-            </a:pPr>
-            <a:r>
-              <a:t>  - 有害词后处理模块可有效兜底</a:t>
-            </a:r>
-          </a:p>
-          <a:p>
-            <a:pPr>
-              <a:spcAft>
-                <a:spcPts val="800"/>
-              </a:spcAft>
-              <a:defRPr sz="1600">
-                <a:solidFill>
-                  <a:srgbClr val="FFFFFF"/>
-                </a:solidFill>
-                <a:latin typeface="Microsoft YaHei"/>
-              </a:defRPr>
-            </a:pPr>
-          </a:p>
-          <a:p>
-            <a:pPr>
-              <a:spcAft>
-                <a:spcPts val="800"/>
-              </a:spcAft>
-              <a:defRPr sz="1600">
-                <a:solidFill>
-                  <a:srgbClr val="FFFFFF"/>
-                </a:solidFill>
-                <a:latin typeface="Microsoft YaHei"/>
-              </a:defRPr>
-            </a:pPr>
-            <a:r>
-              <a:t>有监督对比学习使模型更倾向于语义改写而非简单删除</a:t>
-            </a:r>
-          </a:p>
-          <a:p>
-            <a:pPr>
-              <a:spcAft>
-                <a:spcPts val="800"/>
-              </a:spcAft>
-              <a:defRPr sz="1600">
-                <a:solidFill>
-                  <a:srgbClr val="FFFFFF"/>
-                </a:solidFill>
-                <a:latin typeface="Microsoft YaHei"/>
-              </a:defRPr>
-            </a:pPr>
-            <a:r>
-              <a:t>  - 生成文本更加自然流畅</a:t>
-            </a:r>
-          </a:p>
-          <a:p>
-            <a:pPr>
-              <a:spcAft>
-                <a:spcPts val="800"/>
-              </a:spcAft>
-              <a:defRPr sz="1600">
-                <a:solidFill>
-                  <a:srgbClr val="FFFFFF"/>
-                </a:solidFill>
-                <a:latin typeface="Microsoft YaHei"/>
-              </a:defRPr>
-            </a:pPr>
-          </a:p>
-          <a:p>
-            <a:pPr>
-              <a:spcAft>
-                <a:spcPts val="800"/>
-              </a:spcAft>
-              <a:defRPr sz="1600">
-                <a:solidFill>
-                  <a:srgbClr val="FFFFFF"/>
-                </a:solidFill>
-                <a:latin typeface="Microsoft YaHei"/>
-              </a:defRPr>
-            </a:pPr>
-            <a:r>
-              <a:t>repetition_penalty + length_penalty 有效抑制简单复制行为</a:t>
+            <a:r>
+              <a:t>mT5-base 替代 mt0-large: -&gt; 对 detoxify 指令理解不足</a:t>
             </a:r>
           </a:p>
         </p:txBody>
